--- a/SupplFigure1/SupplementaryFigure1.pptx
+++ b/SupplFigure1/SupplementaryFigure1.pptx
@@ -243,7 +243,7 @@
           <a:p>
             <a:fld id="{A4BDA5CE-77F4-40B0-91A8-2181979C7B55}" type="datetimeFigureOut">
               <a:rPr lang="en-US" smtClean="0"/>
-              <a:t>03/24/25</a:t>
+              <a:t>01/04/26</a:t>
             </a:fld>
             <a:endParaRPr lang="en-US"/>
           </a:p>
@@ -413,7 +413,7 @@
           <a:p>
             <a:fld id="{A4BDA5CE-77F4-40B0-91A8-2181979C7B55}" type="datetimeFigureOut">
               <a:rPr lang="en-US" smtClean="0"/>
-              <a:t>03/24/25</a:t>
+              <a:t>01/04/26</a:t>
             </a:fld>
             <a:endParaRPr lang="en-US"/>
           </a:p>
@@ -593,7 +593,7 @@
           <a:p>
             <a:fld id="{A4BDA5CE-77F4-40B0-91A8-2181979C7B55}" type="datetimeFigureOut">
               <a:rPr lang="en-US" smtClean="0"/>
-              <a:t>03/24/25</a:t>
+              <a:t>01/04/26</a:t>
             </a:fld>
             <a:endParaRPr lang="en-US"/>
           </a:p>
@@ -763,7 +763,7 @@
           <a:p>
             <a:fld id="{A4BDA5CE-77F4-40B0-91A8-2181979C7B55}" type="datetimeFigureOut">
               <a:rPr lang="en-US" smtClean="0"/>
-              <a:t>03/24/25</a:t>
+              <a:t>01/04/26</a:t>
             </a:fld>
             <a:endParaRPr lang="en-US"/>
           </a:p>
@@ -1009,7 +1009,7 @@
           <a:p>
             <a:fld id="{A4BDA5CE-77F4-40B0-91A8-2181979C7B55}" type="datetimeFigureOut">
               <a:rPr lang="en-US" smtClean="0"/>
-              <a:t>03/24/25</a:t>
+              <a:t>01/04/26</a:t>
             </a:fld>
             <a:endParaRPr lang="en-US"/>
           </a:p>
@@ -1241,7 +1241,7 @@
           <a:p>
             <a:fld id="{A4BDA5CE-77F4-40B0-91A8-2181979C7B55}" type="datetimeFigureOut">
               <a:rPr lang="en-US" smtClean="0"/>
-              <a:t>03/24/25</a:t>
+              <a:t>01/04/26</a:t>
             </a:fld>
             <a:endParaRPr lang="en-US"/>
           </a:p>
@@ -1608,7 +1608,7 @@
           <a:p>
             <a:fld id="{A4BDA5CE-77F4-40B0-91A8-2181979C7B55}" type="datetimeFigureOut">
               <a:rPr lang="en-US" smtClean="0"/>
-              <a:t>03/24/25</a:t>
+              <a:t>01/04/26</a:t>
             </a:fld>
             <a:endParaRPr lang="en-US"/>
           </a:p>
@@ -1726,7 +1726,7 @@
           <a:p>
             <a:fld id="{A4BDA5CE-77F4-40B0-91A8-2181979C7B55}" type="datetimeFigureOut">
               <a:rPr lang="en-US" smtClean="0"/>
-              <a:t>03/24/25</a:t>
+              <a:t>01/04/26</a:t>
             </a:fld>
             <a:endParaRPr lang="en-US"/>
           </a:p>
@@ -1821,7 +1821,7 @@
           <a:p>
             <a:fld id="{A4BDA5CE-77F4-40B0-91A8-2181979C7B55}" type="datetimeFigureOut">
               <a:rPr lang="en-US" smtClean="0"/>
-              <a:t>03/24/25</a:t>
+              <a:t>01/04/26</a:t>
             </a:fld>
             <a:endParaRPr lang="en-US"/>
           </a:p>
@@ -2098,7 +2098,7 @@
           <a:p>
             <a:fld id="{A4BDA5CE-77F4-40B0-91A8-2181979C7B55}" type="datetimeFigureOut">
               <a:rPr lang="en-US" smtClean="0"/>
-              <a:t>03/24/25</a:t>
+              <a:t>01/04/26</a:t>
             </a:fld>
             <a:endParaRPr lang="en-US"/>
           </a:p>
@@ -2355,7 +2355,7 @@
           <a:p>
             <a:fld id="{A4BDA5CE-77F4-40B0-91A8-2181979C7B55}" type="datetimeFigureOut">
               <a:rPr lang="en-US" smtClean="0"/>
-              <a:t>03/24/25</a:t>
+              <a:t>01/04/26</a:t>
             </a:fld>
             <a:endParaRPr lang="en-US"/>
           </a:p>
@@ -2568,7 +2568,7 @@
           <a:p>
             <a:fld id="{A4BDA5CE-77F4-40B0-91A8-2181979C7B55}" type="datetimeFigureOut">
               <a:rPr lang="en-US" smtClean="0"/>
-              <a:t>03/24/25</a:t>
+              <a:t>01/04/26</a:t>
             </a:fld>
             <a:endParaRPr lang="en-US"/>
           </a:p>
@@ -2975,10 +2975,10 @@
       </p:grpSpPr>
       <p:pic>
         <p:nvPicPr>
-          <p:cNvPr id="58" name="Graphic 57">
+          <p:cNvPr id="71" name="Graphic 70">
             <a:extLst>
               <a:ext uri="{FF2B5EF4-FFF2-40B4-BE49-F238E27FC236}">
-                <a16:creationId xmlns:a16="http://schemas.microsoft.com/office/drawing/2014/main" id="{1F67563E-914B-8AFA-EF9C-C5235C7D729B}"/>
+                <a16:creationId xmlns:a16="http://schemas.microsoft.com/office/drawing/2014/main" id="{DEB2A15F-96B8-B5FC-F3FD-D4947173D957}"/>
               </a:ext>
             </a:extLst>
           </p:cNvPr>
@@ -3001,434 +3001,20 @@
         </p:blipFill>
         <p:spPr>
           <a:xfrm>
-            <a:off x="2076450" y="518066"/>
-            <a:ext cx="8648700" cy="4657725"/>
+            <a:off x="24660" y="12058133"/>
+            <a:ext cx="12776940" cy="8155493"/>
           </a:xfrm>
           <a:prstGeom prst="rect">
             <a:avLst/>
           </a:prstGeom>
         </p:spPr>
       </p:pic>
-      <p:cxnSp>
-        <p:nvCxnSpPr>
-          <p:cNvPr id="59" name="Straight Connector 58">
+      <p:pic>
+        <p:nvPicPr>
+          <p:cNvPr id="3" name="Graphic 2">
             <a:extLst>
               <a:ext uri="{FF2B5EF4-FFF2-40B4-BE49-F238E27FC236}">
-                <a16:creationId xmlns:a16="http://schemas.microsoft.com/office/drawing/2014/main" id="{E6070A99-A954-0F94-6D11-922841AC2728}"/>
-              </a:ext>
-            </a:extLst>
-          </p:cNvPr>
-          <p:cNvCxnSpPr>
-            <a:cxnSpLocks/>
-          </p:cNvCxnSpPr>
-          <p:nvPr/>
-        </p:nvCxnSpPr>
-        <p:spPr>
-          <a:xfrm>
-            <a:off x="4081405" y="6232389"/>
-            <a:ext cx="1894114" cy="0"/>
-          </a:xfrm>
-          <a:prstGeom prst="line">
-            <a:avLst/>
-          </a:prstGeom>
-          <a:ln w="57150"/>
-        </p:spPr>
-        <p:style>
-          <a:lnRef idx="1">
-            <a:schemeClr val="dk1"/>
-          </a:lnRef>
-          <a:fillRef idx="0">
-            <a:schemeClr val="dk1"/>
-          </a:fillRef>
-          <a:effectRef idx="0">
-            <a:schemeClr val="dk1"/>
-          </a:effectRef>
-          <a:fontRef idx="minor">
-            <a:schemeClr val="tx1"/>
-          </a:fontRef>
-        </p:style>
-      </p:cxnSp>
-      <p:sp>
-        <p:nvSpPr>
-          <p:cNvPr id="60" name="TextBox 59">
-            <a:extLst>
-              <a:ext uri="{FF2B5EF4-FFF2-40B4-BE49-F238E27FC236}">
-                <a16:creationId xmlns:a16="http://schemas.microsoft.com/office/drawing/2014/main" id="{28753C7C-EFDB-19E1-EF5B-F9C7A08FF0EB}"/>
-              </a:ext>
-            </a:extLst>
-          </p:cNvPr>
-          <p:cNvSpPr txBox="1"/>
-          <p:nvPr/>
-        </p:nvSpPr>
-        <p:spPr>
-          <a:xfrm>
-            <a:off x="3687902" y="6192333"/>
-            <a:ext cx="2681120" cy="1077218"/>
-          </a:xfrm>
-          <a:prstGeom prst="rect">
-            <a:avLst/>
-          </a:prstGeom>
-          <a:noFill/>
-        </p:spPr>
-        <p:txBody>
-          <a:bodyPr wrap="none" rtlCol="0">
-            <a:spAutoFit/>
-          </a:bodyPr>
-          <a:lstStyle/>
-          <a:p>
-            <a:pPr algn="ctr"/>
-            <a:r>
-              <a:rPr lang="en-US" sz="3200" u="sng" dirty="0">
-                <a:latin typeface="DejaVu Sans" panose="020B0603030804020204" pitchFamily="34" charset="0"/>
-                <a:ea typeface="DejaVu Sans" panose="020B0603030804020204" pitchFamily="34" charset="0"/>
-                <a:cs typeface="DejaVu Sans" panose="020B0603030804020204" pitchFamily="34" charset="0"/>
-              </a:rPr>
-              <a:t>Viral-human</a:t>
-            </a:r>
-          </a:p>
-          <a:p>
-            <a:pPr algn="ctr"/>
-            <a:r>
-              <a:rPr lang="en-US" sz="3200" u="sng" dirty="0">
-                <a:latin typeface="DejaVu Sans" panose="020B0603030804020204" pitchFamily="34" charset="0"/>
-                <a:ea typeface="DejaVu Sans" panose="020B0603030804020204" pitchFamily="34" charset="0"/>
-                <a:cs typeface="DejaVu Sans" panose="020B0603030804020204" pitchFamily="34" charset="0"/>
-              </a:rPr>
-              <a:t>interactions</a:t>
-            </a:r>
-          </a:p>
-        </p:txBody>
-      </p:sp>
-      <p:cxnSp>
-        <p:nvCxnSpPr>
-          <p:cNvPr id="61" name="Straight Connector 60">
-            <a:extLst>
-              <a:ext uri="{FF2B5EF4-FFF2-40B4-BE49-F238E27FC236}">
-                <a16:creationId xmlns:a16="http://schemas.microsoft.com/office/drawing/2014/main" id="{39305C24-3A04-7F31-36EC-72E2C7F95808}"/>
-              </a:ext>
-            </a:extLst>
-          </p:cNvPr>
-          <p:cNvCxnSpPr>
-            <a:cxnSpLocks/>
-          </p:cNvCxnSpPr>
-          <p:nvPr/>
-        </p:nvCxnSpPr>
-        <p:spPr>
-          <a:xfrm>
-            <a:off x="7021287" y="6232389"/>
-            <a:ext cx="1894114" cy="0"/>
-          </a:xfrm>
-          <a:prstGeom prst="line">
-            <a:avLst/>
-          </a:prstGeom>
-          <a:ln w="57150"/>
-        </p:spPr>
-        <p:style>
-          <a:lnRef idx="1">
-            <a:schemeClr val="dk1"/>
-          </a:lnRef>
-          <a:fillRef idx="0">
-            <a:schemeClr val="dk1"/>
-          </a:fillRef>
-          <a:effectRef idx="0">
-            <a:schemeClr val="dk1"/>
-          </a:effectRef>
-          <a:fontRef idx="minor">
-            <a:schemeClr val="tx1"/>
-          </a:fontRef>
-        </p:style>
-      </p:cxnSp>
-      <p:sp>
-        <p:nvSpPr>
-          <p:cNvPr id="62" name="TextBox 61">
-            <a:extLst>
-              <a:ext uri="{FF2B5EF4-FFF2-40B4-BE49-F238E27FC236}">
-                <a16:creationId xmlns:a16="http://schemas.microsoft.com/office/drawing/2014/main" id="{D1B684F0-AD2A-6F93-4513-258CFA9C16C0}"/>
-              </a:ext>
-            </a:extLst>
-          </p:cNvPr>
-          <p:cNvSpPr txBox="1"/>
-          <p:nvPr/>
-        </p:nvSpPr>
-        <p:spPr>
-          <a:xfrm>
-            <a:off x="6369022" y="6192333"/>
-            <a:ext cx="3469219" cy="1077218"/>
-          </a:xfrm>
-          <a:prstGeom prst="rect">
-            <a:avLst/>
-          </a:prstGeom>
-          <a:noFill/>
-        </p:spPr>
-        <p:txBody>
-          <a:bodyPr wrap="none" rtlCol="0">
-            <a:spAutoFit/>
-          </a:bodyPr>
-          <a:lstStyle/>
-          <a:p>
-            <a:pPr algn="ctr"/>
-            <a:r>
-              <a:rPr lang="en-US" sz="3200" u="sng" dirty="0">
-                <a:latin typeface="DejaVu Sans" panose="020B0603030804020204" pitchFamily="34" charset="0"/>
-                <a:ea typeface="DejaVu Sans" panose="020B0603030804020204" pitchFamily="34" charset="0"/>
-                <a:cs typeface="DejaVu Sans" panose="020B0603030804020204" pitchFamily="34" charset="0"/>
-              </a:rPr>
-              <a:t>Bacteria-human</a:t>
-            </a:r>
-          </a:p>
-          <a:p>
-            <a:pPr algn="ctr"/>
-            <a:r>
-              <a:rPr lang="en-US" sz="3200" u="sng" dirty="0">
-                <a:latin typeface="DejaVu Sans" panose="020B0603030804020204" pitchFamily="34" charset="0"/>
-                <a:ea typeface="DejaVu Sans" panose="020B0603030804020204" pitchFamily="34" charset="0"/>
-                <a:cs typeface="DejaVu Sans" panose="020B0603030804020204" pitchFamily="34" charset="0"/>
-              </a:rPr>
-              <a:t>interactions</a:t>
-            </a:r>
-          </a:p>
-        </p:txBody>
-      </p:sp>
-      <p:sp>
-        <p:nvSpPr>
-          <p:cNvPr id="63" name="TextBox 62">
-            <a:extLst>
-              <a:ext uri="{FF2B5EF4-FFF2-40B4-BE49-F238E27FC236}">
-                <a16:creationId xmlns:a16="http://schemas.microsoft.com/office/drawing/2014/main" id="{4B8BEF60-9A82-E484-295A-343FC9BEFF6E}"/>
-              </a:ext>
-            </a:extLst>
-          </p:cNvPr>
-          <p:cNvSpPr txBox="1"/>
-          <p:nvPr/>
-        </p:nvSpPr>
-        <p:spPr>
-          <a:xfrm rot="17907094">
-            <a:off x="5275127" y="4977721"/>
-            <a:ext cx="864339" cy="461665"/>
-          </a:xfrm>
-          <a:prstGeom prst="rect">
-            <a:avLst/>
-          </a:prstGeom>
-          <a:noFill/>
-        </p:spPr>
-        <p:txBody>
-          <a:bodyPr wrap="none" rtlCol="0">
-            <a:spAutoFit/>
-          </a:bodyPr>
-          <a:lstStyle/>
-          <a:p>
-            <a:r>
-              <a:rPr lang="en-US" sz="2400" dirty="0">
-                <a:latin typeface="DejaVu Sans" panose="020B0603030804020204" pitchFamily="34" charset="0"/>
-                <a:ea typeface="DejaVu Sans" panose="020B0603030804020204" pitchFamily="34" charset="0"/>
-                <a:cs typeface="DejaVu Sans" panose="020B0603030804020204" pitchFamily="34" charset="0"/>
-              </a:rPr>
-              <a:t>Joint</a:t>
-            </a:r>
-          </a:p>
-        </p:txBody>
-      </p:sp>
-      <p:sp>
-        <p:nvSpPr>
-          <p:cNvPr id="64" name="TextBox 63">
-            <a:extLst>
-              <a:ext uri="{FF2B5EF4-FFF2-40B4-BE49-F238E27FC236}">
-                <a16:creationId xmlns:a16="http://schemas.microsoft.com/office/drawing/2014/main" id="{46C8CBDE-450F-86E7-4273-786F90C171CF}"/>
-              </a:ext>
-            </a:extLst>
-          </p:cNvPr>
-          <p:cNvSpPr txBox="1"/>
-          <p:nvPr/>
-        </p:nvSpPr>
-        <p:spPr>
-          <a:xfrm rot="17907094">
-            <a:off x="4470564" y="5017748"/>
-            <a:ext cx="955390" cy="461665"/>
-          </a:xfrm>
-          <a:prstGeom prst="rect">
-            <a:avLst/>
-          </a:prstGeom>
-          <a:noFill/>
-        </p:spPr>
-        <p:txBody>
-          <a:bodyPr wrap="none" rtlCol="0">
-            <a:spAutoFit/>
-          </a:bodyPr>
-          <a:lstStyle/>
-          <a:p>
-            <a:r>
-              <a:rPr lang="en-US" sz="2400" dirty="0">
-                <a:latin typeface="DejaVu Sans" panose="020B0603030804020204" pitchFamily="34" charset="0"/>
-                <a:ea typeface="DejaVu Sans" panose="020B0603030804020204" pitchFamily="34" charset="0"/>
-                <a:cs typeface="DejaVu Sans" panose="020B0603030804020204" pitchFamily="34" charset="0"/>
-              </a:rPr>
-              <a:t>Virus</a:t>
-            </a:r>
-          </a:p>
-        </p:txBody>
-      </p:sp>
-      <p:sp>
-        <p:nvSpPr>
-          <p:cNvPr id="65" name="TextBox 64">
-            <a:extLst>
-              <a:ext uri="{FF2B5EF4-FFF2-40B4-BE49-F238E27FC236}">
-                <a16:creationId xmlns:a16="http://schemas.microsoft.com/office/drawing/2014/main" id="{417BEBEF-835B-4319-9455-5BA6E76CD9BE}"/>
-              </a:ext>
-            </a:extLst>
-          </p:cNvPr>
-          <p:cNvSpPr txBox="1"/>
-          <p:nvPr/>
-        </p:nvSpPr>
-        <p:spPr>
-          <a:xfrm rot="17907094">
-            <a:off x="3600150" y="5127602"/>
-            <a:ext cx="1295547" cy="461665"/>
-          </a:xfrm>
-          <a:prstGeom prst="rect">
-            <a:avLst/>
-          </a:prstGeom>
-          <a:noFill/>
-        </p:spPr>
-        <p:txBody>
-          <a:bodyPr wrap="none" rtlCol="0">
-            <a:spAutoFit/>
-          </a:bodyPr>
-          <a:lstStyle/>
-          <a:p>
-            <a:r>
-              <a:rPr lang="en-US" sz="2400" dirty="0">
-                <a:latin typeface="DejaVu Sans" panose="020B0603030804020204" pitchFamily="34" charset="0"/>
-                <a:ea typeface="DejaVu Sans" panose="020B0603030804020204" pitchFamily="34" charset="0"/>
-                <a:cs typeface="DejaVu Sans" panose="020B0603030804020204" pitchFamily="34" charset="0"/>
-              </a:rPr>
-              <a:t>Human</a:t>
-            </a:r>
-          </a:p>
-        </p:txBody>
-      </p:sp>
-      <p:sp>
-        <p:nvSpPr>
-          <p:cNvPr id="66" name="TextBox 65">
-            <a:extLst>
-              <a:ext uri="{FF2B5EF4-FFF2-40B4-BE49-F238E27FC236}">
-                <a16:creationId xmlns:a16="http://schemas.microsoft.com/office/drawing/2014/main" id="{9C10DF5F-C5B5-558E-FE84-2496F2A99B49}"/>
-              </a:ext>
-            </a:extLst>
-          </p:cNvPr>
-          <p:cNvSpPr txBox="1"/>
-          <p:nvPr/>
-        </p:nvSpPr>
-        <p:spPr>
-          <a:xfrm rot="17907094">
-            <a:off x="8080308" y="4977721"/>
-            <a:ext cx="864339" cy="461665"/>
-          </a:xfrm>
-          <a:prstGeom prst="rect">
-            <a:avLst/>
-          </a:prstGeom>
-          <a:noFill/>
-        </p:spPr>
-        <p:txBody>
-          <a:bodyPr wrap="none" rtlCol="0">
-            <a:spAutoFit/>
-          </a:bodyPr>
-          <a:lstStyle/>
-          <a:p>
-            <a:r>
-              <a:rPr lang="en-US" sz="2400" dirty="0">
-                <a:latin typeface="DejaVu Sans" panose="020B0603030804020204" pitchFamily="34" charset="0"/>
-                <a:ea typeface="DejaVu Sans" panose="020B0603030804020204" pitchFamily="34" charset="0"/>
-                <a:cs typeface="DejaVu Sans" panose="020B0603030804020204" pitchFamily="34" charset="0"/>
-              </a:rPr>
-              <a:t>Joint</a:t>
-            </a:r>
-          </a:p>
-        </p:txBody>
-      </p:sp>
-      <p:sp>
-        <p:nvSpPr>
-          <p:cNvPr id="67" name="TextBox 66">
-            <a:extLst>
-              <a:ext uri="{FF2B5EF4-FFF2-40B4-BE49-F238E27FC236}">
-                <a16:creationId xmlns:a16="http://schemas.microsoft.com/office/drawing/2014/main" id="{F2148990-2A87-DDEF-8FBE-B0FF3FC5C563}"/>
-              </a:ext>
-            </a:extLst>
-          </p:cNvPr>
-          <p:cNvSpPr txBox="1"/>
-          <p:nvPr/>
-        </p:nvSpPr>
-        <p:spPr>
-          <a:xfrm rot="17907094">
-            <a:off x="6984815" y="5187267"/>
-            <a:ext cx="1465466" cy="461665"/>
-          </a:xfrm>
-          <a:prstGeom prst="rect">
-            <a:avLst/>
-          </a:prstGeom>
-          <a:noFill/>
-        </p:spPr>
-        <p:txBody>
-          <a:bodyPr wrap="none" rtlCol="0">
-            <a:spAutoFit/>
-          </a:bodyPr>
-          <a:lstStyle/>
-          <a:p>
-            <a:r>
-              <a:rPr lang="en-US" sz="2400" dirty="0">
-                <a:latin typeface="DejaVu Sans" panose="020B0603030804020204" pitchFamily="34" charset="0"/>
-                <a:ea typeface="DejaVu Sans" panose="020B0603030804020204" pitchFamily="34" charset="0"/>
-                <a:cs typeface="DejaVu Sans" panose="020B0603030804020204" pitchFamily="34" charset="0"/>
-              </a:rPr>
-              <a:t>Bacteria</a:t>
-            </a:r>
-          </a:p>
-        </p:txBody>
-      </p:sp>
-      <p:sp>
-        <p:nvSpPr>
-          <p:cNvPr id="68" name="TextBox 67">
-            <a:extLst>
-              <a:ext uri="{FF2B5EF4-FFF2-40B4-BE49-F238E27FC236}">
-                <a16:creationId xmlns:a16="http://schemas.microsoft.com/office/drawing/2014/main" id="{C73AF95F-4C8E-9106-27A2-5D799E0156F3}"/>
-              </a:ext>
-            </a:extLst>
-          </p:cNvPr>
-          <p:cNvSpPr txBox="1"/>
-          <p:nvPr/>
-        </p:nvSpPr>
-        <p:spPr>
-          <a:xfrm rot="17907094">
-            <a:off x="6405331" y="5127602"/>
-            <a:ext cx="1295547" cy="461665"/>
-          </a:xfrm>
-          <a:prstGeom prst="rect">
-            <a:avLst/>
-          </a:prstGeom>
-          <a:noFill/>
-        </p:spPr>
-        <p:txBody>
-          <a:bodyPr wrap="none" rtlCol="0">
-            <a:spAutoFit/>
-          </a:bodyPr>
-          <a:lstStyle/>
-          <a:p>
-            <a:r>
-              <a:rPr lang="en-US" sz="2400" dirty="0">
-                <a:latin typeface="DejaVu Sans" panose="020B0603030804020204" pitchFamily="34" charset="0"/>
-                <a:ea typeface="DejaVu Sans" panose="020B0603030804020204" pitchFamily="34" charset="0"/>
-                <a:cs typeface="DejaVu Sans" panose="020B0603030804020204" pitchFamily="34" charset="0"/>
-              </a:rPr>
-              <a:t>Human</a:t>
-            </a:r>
-          </a:p>
-        </p:txBody>
-      </p:sp>
-      <p:pic>
-        <p:nvPicPr>
-          <p:cNvPr id="69" name="Graphic 68">
-            <a:extLst>
-              <a:ext uri="{FF2B5EF4-FFF2-40B4-BE49-F238E27FC236}">
-                <a16:creationId xmlns:a16="http://schemas.microsoft.com/office/drawing/2014/main" id="{7FB91569-B4DB-F3AA-C167-C47A6EF46401}"/>
+                <a16:creationId xmlns:a16="http://schemas.microsoft.com/office/drawing/2014/main" id="{3A9AC91E-EFE2-F13E-0753-278D23DFB885}"/>
               </a:ext>
             </a:extLst>
           </p:cNvPr>
@@ -3451,8 +3037,8 @@
         </p:blipFill>
         <p:spPr>
           <a:xfrm>
-            <a:off x="6907837" y="8032218"/>
-            <a:ext cx="5490990" cy="4394841"/>
+            <a:off x="118872" y="7491887"/>
+            <a:ext cx="6281928" cy="4731452"/>
           </a:xfrm>
           <a:prstGeom prst="rect">
             <a:avLst/>
@@ -3461,10 +3047,10 @@
       </p:pic>
       <p:pic>
         <p:nvPicPr>
-          <p:cNvPr id="70" name="Graphic 69">
+          <p:cNvPr id="58" name="Graphic 57">
             <a:extLst>
               <a:ext uri="{FF2B5EF4-FFF2-40B4-BE49-F238E27FC236}">
-                <a16:creationId xmlns:a16="http://schemas.microsoft.com/office/drawing/2014/main" id="{9F66BA36-F585-96DD-37B0-50170CE44891}"/>
+                <a16:creationId xmlns:a16="http://schemas.microsoft.com/office/drawing/2014/main" id="{1F67563E-914B-8AFA-EF9C-C5235C7D729B}"/>
               </a:ext>
             </a:extLst>
           </p:cNvPr>
@@ -3487,20 +3073,434 @@
         </p:blipFill>
         <p:spPr>
           <a:xfrm>
-            <a:off x="118151" y="7906927"/>
-            <a:ext cx="6282649" cy="4855707"/>
+            <a:off x="2076450" y="518066"/>
+            <a:ext cx="8648700" cy="4657725"/>
           </a:xfrm>
           <a:prstGeom prst="rect">
             <a:avLst/>
           </a:prstGeom>
         </p:spPr>
       </p:pic>
+      <p:cxnSp>
+        <p:nvCxnSpPr>
+          <p:cNvPr id="59" name="Straight Connector 58">
+            <a:extLst>
+              <a:ext uri="{FF2B5EF4-FFF2-40B4-BE49-F238E27FC236}">
+                <a16:creationId xmlns:a16="http://schemas.microsoft.com/office/drawing/2014/main" id="{E6070A99-A954-0F94-6D11-922841AC2728}"/>
+              </a:ext>
+            </a:extLst>
+          </p:cNvPr>
+          <p:cNvCxnSpPr>
+            <a:cxnSpLocks/>
+          </p:cNvCxnSpPr>
+          <p:nvPr/>
+        </p:nvCxnSpPr>
+        <p:spPr>
+          <a:xfrm>
+            <a:off x="4081405" y="6232389"/>
+            <a:ext cx="1894114" cy="0"/>
+          </a:xfrm>
+          <a:prstGeom prst="line">
+            <a:avLst/>
+          </a:prstGeom>
+          <a:ln w="57150"/>
+        </p:spPr>
+        <p:style>
+          <a:lnRef idx="1">
+            <a:schemeClr val="dk1"/>
+          </a:lnRef>
+          <a:fillRef idx="0">
+            <a:schemeClr val="dk1"/>
+          </a:fillRef>
+          <a:effectRef idx="0">
+            <a:schemeClr val="dk1"/>
+          </a:effectRef>
+          <a:fontRef idx="minor">
+            <a:schemeClr val="tx1"/>
+          </a:fontRef>
+        </p:style>
+      </p:cxnSp>
+      <p:sp>
+        <p:nvSpPr>
+          <p:cNvPr id="60" name="TextBox 59">
+            <a:extLst>
+              <a:ext uri="{FF2B5EF4-FFF2-40B4-BE49-F238E27FC236}">
+                <a16:creationId xmlns:a16="http://schemas.microsoft.com/office/drawing/2014/main" id="{28753C7C-EFDB-19E1-EF5B-F9C7A08FF0EB}"/>
+              </a:ext>
+            </a:extLst>
+          </p:cNvPr>
+          <p:cNvSpPr txBox="1"/>
+          <p:nvPr/>
+        </p:nvSpPr>
+        <p:spPr>
+          <a:xfrm>
+            <a:off x="3687902" y="6192333"/>
+            <a:ext cx="2681120" cy="1077218"/>
+          </a:xfrm>
+          <a:prstGeom prst="rect">
+            <a:avLst/>
+          </a:prstGeom>
+          <a:noFill/>
+        </p:spPr>
+        <p:txBody>
+          <a:bodyPr wrap="none" rtlCol="0">
+            <a:spAutoFit/>
+          </a:bodyPr>
+          <a:lstStyle/>
+          <a:p>
+            <a:pPr algn="ctr"/>
+            <a:r>
+              <a:rPr lang="en-US" sz="3200" u="sng" dirty="0">
+                <a:latin typeface="DejaVu Sans" panose="020B0603030804020204" pitchFamily="34" charset="0"/>
+                <a:ea typeface="DejaVu Sans" panose="020B0603030804020204" pitchFamily="34" charset="0"/>
+                <a:cs typeface="DejaVu Sans" panose="020B0603030804020204" pitchFamily="34" charset="0"/>
+              </a:rPr>
+              <a:t>Viral-human</a:t>
+            </a:r>
+          </a:p>
+          <a:p>
+            <a:pPr algn="ctr"/>
+            <a:r>
+              <a:rPr lang="en-US" sz="3200" u="sng" dirty="0">
+                <a:latin typeface="DejaVu Sans" panose="020B0603030804020204" pitchFamily="34" charset="0"/>
+                <a:ea typeface="DejaVu Sans" panose="020B0603030804020204" pitchFamily="34" charset="0"/>
+                <a:cs typeface="DejaVu Sans" panose="020B0603030804020204" pitchFamily="34" charset="0"/>
+              </a:rPr>
+              <a:t>interactions</a:t>
+            </a:r>
+          </a:p>
+        </p:txBody>
+      </p:sp>
+      <p:cxnSp>
+        <p:nvCxnSpPr>
+          <p:cNvPr id="61" name="Straight Connector 60">
+            <a:extLst>
+              <a:ext uri="{FF2B5EF4-FFF2-40B4-BE49-F238E27FC236}">
+                <a16:creationId xmlns:a16="http://schemas.microsoft.com/office/drawing/2014/main" id="{39305C24-3A04-7F31-36EC-72E2C7F95808}"/>
+              </a:ext>
+            </a:extLst>
+          </p:cNvPr>
+          <p:cNvCxnSpPr>
+            <a:cxnSpLocks/>
+          </p:cNvCxnSpPr>
+          <p:nvPr/>
+        </p:nvCxnSpPr>
+        <p:spPr>
+          <a:xfrm>
+            <a:off x="7021287" y="6232389"/>
+            <a:ext cx="1894114" cy="0"/>
+          </a:xfrm>
+          <a:prstGeom prst="line">
+            <a:avLst/>
+          </a:prstGeom>
+          <a:ln w="57150"/>
+        </p:spPr>
+        <p:style>
+          <a:lnRef idx="1">
+            <a:schemeClr val="dk1"/>
+          </a:lnRef>
+          <a:fillRef idx="0">
+            <a:schemeClr val="dk1"/>
+          </a:fillRef>
+          <a:effectRef idx="0">
+            <a:schemeClr val="dk1"/>
+          </a:effectRef>
+          <a:fontRef idx="minor">
+            <a:schemeClr val="tx1"/>
+          </a:fontRef>
+        </p:style>
+      </p:cxnSp>
+      <p:sp>
+        <p:nvSpPr>
+          <p:cNvPr id="62" name="TextBox 61">
+            <a:extLst>
+              <a:ext uri="{FF2B5EF4-FFF2-40B4-BE49-F238E27FC236}">
+                <a16:creationId xmlns:a16="http://schemas.microsoft.com/office/drawing/2014/main" id="{D1B684F0-AD2A-6F93-4513-258CFA9C16C0}"/>
+              </a:ext>
+            </a:extLst>
+          </p:cNvPr>
+          <p:cNvSpPr txBox="1"/>
+          <p:nvPr/>
+        </p:nvSpPr>
+        <p:spPr>
+          <a:xfrm>
+            <a:off x="6369022" y="6192333"/>
+            <a:ext cx="3469219" cy="1077218"/>
+          </a:xfrm>
+          <a:prstGeom prst="rect">
+            <a:avLst/>
+          </a:prstGeom>
+          <a:noFill/>
+        </p:spPr>
+        <p:txBody>
+          <a:bodyPr wrap="none" rtlCol="0">
+            <a:spAutoFit/>
+          </a:bodyPr>
+          <a:lstStyle/>
+          <a:p>
+            <a:pPr algn="ctr"/>
+            <a:r>
+              <a:rPr lang="en-US" sz="3200" u="sng" dirty="0">
+                <a:latin typeface="DejaVu Sans" panose="020B0603030804020204" pitchFamily="34" charset="0"/>
+                <a:ea typeface="DejaVu Sans" panose="020B0603030804020204" pitchFamily="34" charset="0"/>
+                <a:cs typeface="DejaVu Sans" panose="020B0603030804020204" pitchFamily="34" charset="0"/>
+              </a:rPr>
+              <a:t>Bacteria-human</a:t>
+            </a:r>
+          </a:p>
+          <a:p>
+            <a:pPr algn="ctr"/>
+            <a:r>
+              <a:rPr lang="en-US" sz="3200" u="sng" dirty="0">
+                <a:latin typeface="DejaVu Sans" panose="020B0603030804020204" pitchFamily="34" charset="0"/>
+                <a:ea typeface="DejaVu Sans" panose="020B0603030804020204" pitchFamily="34" charset="0"/>
+                <a:cs typeface="DejaVu Sans" panose="020B0603030804020204" pitchFamily="34" charset="0"/>
+              </a:rPr>
+              <a:t>interactions</a:t>
+            </a:r>
+          </a:p>
+        </p:txBody>
+      </p:sp>
+      <p:sp>
+        <p:nvSpPr>
+          <p:cNvPr id="63" name="TextBox 62">
+            <a:extLst>
+              <a:ext uri="{FF2B5EF4-FFF2-40B4-BE49-F238E27FC236}">
+                <a16:creationId xmlns:a16="http://schemas.microsoft.com/office/drawing/2014/main" id="{4B8BEF60-9A82-E484-295A-343FC9BEFF6E}"/>
+              </a:ext>
+            </a:extLst>
+          </p:cNvPr>
+          <p:cNvSpPr txBox="1"/>
+          <p:nvPr/>
+        </p:nvSpPr>
+        <p:spPr>
+          <a:xfrm rot="17907094">
+            <a:off x="5149171" y="5073974"/>
+            <a:ext cx="1135504" cy="461665"/>
+          </a:xfrm>
+          <a:prstGeom prst="rect">
+            <a:avLst/>
+          </a:prstGeom>
+          <a:noFill/>
+        </p:spPr>
+        <p:txBody>
+          <a:bodyPr wrap="none" rtlCol="0">
+            <a:spAutoFit/>
+          </a:bodyPr>
+          <a:lstStyle/>
+          <a:p>
+            <a:r>
+              <a:rPr lang="en-US" sz="2400" dirty="0">
+                <a:latin typeface="DejaVu Sans" panose="020B0603030804020204" pitchFamily="34" charset="0"/>
+                <a:ea typeface="DejaVu Sans" panose="020B0603030804020204" pitchFamily="34" charset="0"/>
+                <a:cs typeface="DejaVu Sans" panose="020B0603030804020204" pitchFamily="34" charset="0"/>
+              </a:rPr>
+              <a:t>Paired</a:t>
+            </a:r>
+          </a:p>
+        </p:txBody>
+      </p:sp>
+      <p:sp>
+        <p:nvSpPr>
+          <p:cNvPr id="64" name="TextBox 63">
+            <a:extLst>
+              <a:ext uri="{FF2B5EF4-FFF2-40B4-BE49-F238E27FC236}">
+                <a16:creationId xmlns:a16="http://schemas.microsoft.com/office/drawing/2014/main" id="{46C8CBDE-450F-86E7-4273-786F90C171CF}"/>
+              </a:ext>
+            </a:extLst>
+          </p:cNvPr>
+          <p:cNvSpPr txBox="1"/>
+          <p:nvPr/>
+        </p:nvSpPr>
+        <p:spPr>
+          <a:xfrm rot="17907094">
+            <a:off x="4470564" y="5017748"/>
+            <a:ext cx="955390" cy="461665"/>
+          </a:xfrm>
+          <a:prstGeom prst="rect">
+            <a:avLst/>
+          </a:prstGeom>
+          <a:noFill/>
+        </p:spPr>
+        <p:txBody>
+          <a:bodyPr wrap="none" rtlCol="0">
+            <a:spAutoFit/>
+          </a:bodyPr>
+          <a:lstStyle/>
+          <a:p>
+            <a:r>
+              <a:rPr lang="en-US" sz="2400" dirty="0">
+                <a:latin typeface="DejaVu Sans" panose="020B0603030804020204" pitchFamily="34" charset="0"/>
+                <a:ea typeface="DejaVu Sans" panose="020B0603030804020204" pitchFamily="34" charset="0"/>
+                <a:cs typeface="DejaVu Sans" panose="020B0603030804020204" pitchFamily="34" charset="0"/>
+              </a:rPr>
+              <a:t>Virus</a:t>
+            </a:r>
+          </a:p>
+        </p:txBody>
+      </p:sp>
+      <p:sp>
+        <p:nvSpPr>
+          <p:cNvPr id="65" name="TextBox 64">
+            <a:extLst>
+              <a:ext uri="{FF2B5EF4-FFF2-40B4-BE49-F238E27FC236}">
+                <a16:creationId xmlns:a16="http://schemas.microsoft.com/office/drawing/2014/main" id="{417BEBEF-835B-4319-9455-5BA6E76CD9BE}"/>
+              </a:ext>
+            </a:extLst>
+          </p:cNvPr>
+          <p:cNvSpPr txBox="1"/>
+          <p:nvPr/>
+        </p:nvSpPr>
+        <p:spPr>
+          <a:xfrm rot="17907094">
+            <a:off x="3600150" y="5127602"/>
+            <a:ext cx="1295547" cy="461665"/>
+          </a:xfrm>
+          <a:prstGeom prst="rect">
+            <a:avLst/>
+          </a:prstGeom>
+          <a:noFill/>
+        </p:spPr>
+        <p:txBody>
+          <a:bodyPr wrap="none" rtlCol="0">
+            <a:spAutoFit/>
+          </a:bodyPr>
+          <a:lstStyle/>
+          <a:p>
+            <a:r>
+              <a:rPr lang="en-US" sz="2400" dirty="0">
+                <a:latin typeface="DejaVu Sans" panose="020B0603030804020204" pitchFamily="34" charset="0"/>
+                <a:ea typeface="DejaVu Sans" panose="020B0603030804020204" pitchFamily="34" charset="0"/>
+                <a:cs typeface="DejaVu Sans" panose="020B0603030804020204" pitchFamily="34" charset="0"/>
+              </a:rPr>
+              <a:t>Human</a:t>
+            </a:r>
+          </a:p>
+        </p:txBody>
+      </p:sp>
+      <p:sp>
+        <p:nvSpPr>
+          <p:cNvPr id="66" name="TextBox 65">
+            <a:extLst>
+              <a:ext uri="{FF2B5EF4-FFF2-40B4-BE49-F238E27FC236}">
+                <a16:creationId xmlns:a16="http://schemas.microsoft.com/office/drawing/2014/main" id="{9C10DF5F-C5B5-558E-FE84-2496F2A99B49}"/>
+              </a:ext>
+            </a:extLst>
+          </p:cNvPr>
+          <p:cNvSpPr txBox="1"/>
+          <p:nvPr/>
+        </p:nvSpPr>
+        <p:spPr>
+          <a:xfrm rot="17907094">
+            <a:off x="7954352" y="5073974"/>
+            <a:ext cx="1135504" cy="461665"/>
+          </a:xfrm>
+          <a:prstGeom prst="rect">
+            <a:avLst/>
+          </a:prstGeom>
+          <a:noFill/>
+        </p:spPr>
+        <p:txBody>
+          <a:bodyPr wrap="none" rtlCol="0">
+            <a:spAutoFit/>
+          </a:bodyPr>
+          <a:lstStyle/>
+          <a:p>
+            <a:r>
+              <a:rPr lang="en-US" sz="2400" dirty="0">
+                <a:latin typeface="DejaVu Sans" panose="020B0603030804020204" pitchFamily="34" charset="0"/>
+                <a:ea typeface="DejaVu Sans" panose="020B0603030804020204" pitchFamily="34" charset="0"/>
+                <a:cs typeface="DejaVu Sans" panose="020B0603030804020204" pitchFamily="34" charset="0"/>
+              </a:rPr>
+              <a:t>Paired</a:t>
+            </a:r>
+          </a:p>
+        </p:txBody>
+      </p:sp>
+      <p:sp>
+        <p:nvSpPr>
+          <p:cNvPr id="67" name="TextBox 66">
+            <a:extLst>
+              <a:ext uri="{FF2B5EF4-FFF2-40B4-BE49-F238E27FC236}">
+                <a16:creationId xmlns:a16="http://schemas.microsoft.com/office/drawing/2014/main" id="{F2148990-2A87-DDEF-8FBE-B0FF3FC5C563}"/>
+              </a:ext>
+            </a:extLst>
+          </p:cNvPr>
+          <p:cNvSpPr txBox="1"/>
+          <p:nvPr/>
+        </p:nvSpPr>
+        <p:spPr>
+          <a:xfrm rot="17907094">
+            <a:off x="6984815" y="5187267"/>
+            <a:ext cx="1465466" cy="461665"/>
+          </a:xfrm>
+          <a:prstGeom prst="rect">
+            <a:avLst/>
+          </a:prstGeom>
+          <a:noFill/>
+        </p:spPr>
+        <p:txBody>
+          <a:bodyPr wrap="none" rtlCol="0">
+            <a:spAutoFit/>
+          </a:bodyPr>
+          <a:lstStyle/>
+          <a:p>
+            <a:r>
+              <a:rPr lang="en-US" sz="2400" dirty="0">
+                <a:latin typeface="DejaVu Sans" panose="020B0603030804020204" pitchFamily="34" charset="0"/>
+                <a:ea typeface="DejaVu Sans" panose="020B0603030804020204" pitchFamily="34" charset="0"/>
+                <a:cs typeface="DejaVu Sans" panose="020B0603030804020204" pitchFamily="34" charset="0"/>
+              </a:rPr>
+              <a:t>Bacteria</a:t>
+            </a:r>
+          </a:p>
+        </p:txBody>
+      </p:sp>
+      <p:sp>
+        <p:nvSpPr>
+          <p:cNvPr id="68" name="TextBox 67">
+            <a:extLst>
+              <a:ext uri="{FF2B5EF4-FFF2-40B4-BE49-F238E27FC236}">
+                <a16:creationId xmlns:a16="http://schemas.microsoft.com/office/drawing/2014/main" id="{C73AF95F-4C8E-9106-27A2-5D799E0156F3}"/>
+              </a:ext>
+            </a:extLst>
+          </p:cNvPr>
+          <p:cNvSpPr txBox="1"/>
+          <p:nvPr/>
+        </p:nvSpPr>
+        <p:spPr>
+          <a:xfrm rot="17907094">
+            <a:off x="6405331" y="5127602"/>
+            <a:ext cx="1295547" cy="461665"/>
+          </a:xfrm>
+          <a:prstGeom prst="rect">
+            <a:avLst/>
+          </a:prstGeom>
+          <a:noFill/>
+        </p:spPr>
+        <p:txBody>
+          <a:bodyPr wrap="none" rtlCol="0">
+            <a:spAutoFit/>
+          </a:bodyPr>
+          <a:lstStyle/>
+          <a:p>
+            <a:r>
+              <a:rPr lang="en-US" sz="2400" dirty="0">
+                <a:latin typeface="DejaVu Sans" panose="020B0603030804020204" pitchFamily="34" charset="0"/>
+                <a:ea typeface="DejaVu Sans" panose="020B0603030804020204" pitchFamily="34" charset="0"/>
+                <a:cs typeface="DejaVu Sans" panose="020B0603030804020204" pitchFamily="34" charset="0"/>
+              </a:rPr>
+              <a:t>Human</a:t>
+            </a:r>
+          </a:p>
+        </p:txBody>
+      </p:sp>
       <p:pic>
         <p:nvPicPr>
-          <p:cNvPr id="71" name="Graphic 70">
+          <p:cNvPr id="69" name="Graphic 68">
             <a:extLst>
               <a:ext uri="{FF2B5EF4-FFF2-40B4-BE49-F238E27FC236}">
-                <a16:creationId xmlns:a16="http://schemas.microsoft.com/office/drawing/2014/main" id="{DEB2A15F-96B8-B5FC-F3FD-D4947173D957}"/>
+                <a16:creationId xmlns:a16="http://schemas.microsoft.com/office/drawing/2014/main" id="{7FB91569-B4DB-F3AA-C167-C47A6EF46401}"/>
               </a:ext>
             </a:extLst>
           </p:cNvPr>
@@ -3523,8 +3523,8 @@
         </p:blipFill>
         <p:spPr>
           <a:xfrm>
-            <a:off x="24660" y="13014094"/>
-            <a:ext cx="12776940" cy="8155493"/>
+            <a:off x="6907837" y="7491887"/>
+            <a:ext cx="5490990" cy="4394841"/>
           </a:xfrm>
           <a:prstGeom prst="rect">
             <a:avLst/>
@@ -3650,7 +3650,7 @@
         </p:nvSpPr>
         <p:spPr>
           <a:xfrm>
-            <a:off x="55095" y="12690928"/>
+            <a:off x="55095" y="11693403"/>
             <a:ext cx="511679" cy="646331"/>
           </a:xfrm>
           <a:prstGeom prst="rect">

--- a/SupplFigure1/SupplementaryFigure1.pptx
+++ b/SupplFigure1/SupplementaryFigure1.pptx
@@ -2,12 +2,12 @@
 <file path=ppt/presentation.xml><?xml version="1.0" encoding="utf-8"?>
 <p:presentation xmlns:a="http://schemas.openxmlformats.org/drawingml/2006/main" xmlns:r="http://schemas.openxmlformats.org/officeDocument/2006/relationships" xmlns:p="http://schemas.openxmlformats.org/presentationml/2006/main" saveSubsetFonts="1">
   <p:sldMasterIdLst>
-    <p:sldMasterId id="2147483696" r:id="rId1"/>
+    <p:sldMasterId id="2147483720" r:id="rId1"/>
   </p:sldMasterIdLst>
   <p:sldIdLst>
     <p:sldId id="256" r:id="rId2"/>
   </p:sldIdLst>
-  <p:sldSz cx="12801600" cy="20116800"/>
+  <p:sldSz cx="12801600" cy="16916400"/>
   <p:notesSz cx="6858000" cy="9144000"/>
   <p:defaultTextStyle>
     <a:defPPr>
@@ -141,8 +141,8 @@
         </p:nvSpPr>
         <p:spPr>
           <a:xfrm>
-            <a:off x="960120" y="3292265"/>
-            <a:ext cx="10881360" cy="7003627"/>
+            <a:off x="960120" y="2768496"/>
+            <a:ext cx="10881360" cy="5889413"/>
           </a:xfrm>
         </p:spPr>
         <p:txBody>
@@ -173,8 +173,8 @@
         </p:nvSpPr>
         <p:spPr>
           <a:xfrm>
-            <a:off x="1600200" y="10565978"/>
-            <a:ext cx="9601200" cy="4856902"/>
+            <a:off x="1600200" y="8885027"/>
+            <a:ext cx="9601200" cy="4084213"/>
           </a:xfrm>
         </p:spPr>
         <p:txBody>
@@ -243,7 +243,7 @@
           <a:p>
             <a:fld id="{A4BDA5CE-77F4-40B0-91A8-2181979C7B55}" type="datetimeFigureOut">
               <a:rPr lang="en-US" smtClean="0"/>
-              <a:t>01/04/26</a:t>
+              <a:t>01/13/26</a:t>
             </a:fld>
             <a:endParaRPr lang="en-US"/>
           </a:p>
@@ -294,7 +294,7 @@
     </p:spTree>
     <p:extLst>
       <p:ext uri="{BB962C8B-B14F-4D97-AF65-F5344CB8AC3E}">
-        <p14:creationId xmlns:p14="http://schemas.microsoft.com/office/powerpoint/2010/main" val="426858849"/>
+        <p14:creationId xmlns:p14="http://schemas.microsoft.com/office/powerpoint/2010/main" val="4125978203"/>
       </p:ext>
     </p:extLst>
   </p:cSld>
@@ -413,7 +413,7 @@
           <a:p>
             <a:fld id="{A4BDA5CE-77F4-40B0-91A8-2181979C7B55}" type="datetimeFigureOut">
               <a:rPr lang="en-US" smtClean="0"/>
-              <a:t>01/04/26</a:t>
+              <a:t>01/13/26</a:t>
             </a:fld>
             <a:endParaRPr lang="en-US"/>
           </a:p>
@@ -464,7 +464,7 @@
     </p:spTree>
     <p:extLst>
       <p:ext uri="{BB962C8B-B14F-4D97-AF65-F5344CB8AC3E}">
-        <p14:creationId xmlns:p14="http://schemas.microsoft.com/office/powerpoint/2010/main" val="430907467"/>
+        <p14:creationId xmlns:p14="http://schemas.microsoft.com/office/powerpoint/2010/main" val="1112721379"/>
       </p:ext>
     </p:extLst>
   </p:cSld>
@@ -503,8 +503,8 @@
         </p:nvSpPr>
         <p:spPr>
           <a:xfrm>
-            <a:off x="9161146" y="1071033"/>
-            <a:ext cx="2760345" cy="17048058"/>
+            <a:off x="9161146" y="900642"/>
+            <a:ext cx="2760345" cy="14335867"/>
           </a:xfrm>
         </p:spPr>
         <p:txBody>
@@ -531,8 +531,8 @@
         </p:nvSpPr>
         <p:spPr>
           <a:xfrm>
-            <a:off x="880111" y="1071033"/>
-            <a:ext cx="8121015" cy="17048058"/>
+            <a:off x="880111" y="900642"/>
+            <a:ext cx="8121015" cy="14335867"/>
           </a:xfrm>
         </p:spPr>
         <p:txBody>
@@ -593,7 +593,7 @@
           <a:p>
             <a:fld id="{A4BDA5CE-77F4-40B0-91A8-2181979C7B55}" type="datetimeFigureOut">
               <a:rPr lang="en-US" smtClean="0"/>
-              <a:t>01/04/26</a:t>
+              <a:t>01/13/26</a:t>
             </a:fld>
             <a:endParaRPr lang="en-US"/>
           </a:p>
@@ -644,7 +644,7 @@
     </p:spTree>
     <p:extLst>
       <p:ext uri="{BB962C8B-B14F-4D97-AF65-F5344CB8AC3E}">
-        <p14:creationId xmlns:p14="http://schemas.microsoft.com/office/powerpoint/2010/main" val="2752016627"/>
+        <p14:creationId xmlns:p14="http://schemas.microsoft.com/office/powerpoint/2010/main" val="2930400011"/>
       </p:ext>
     </p:extLst>
   </p:cSld>
@@ -763,7 +763,7 @@
           <a:p>
             <a:fld id="{A4BDA5CE-77F4-40B0-91A8-2181979C7B55}" type="datetimeFigureOut">
               <a:rPr lang="en-US" smtClean="0"/>
-              <a:t>01/04/26</a:t>
+              <a:t>01/13/26</a:t>
             </a:fld>
             <a:endParaRPr lang="en-US"/>
           </a:p>
@@ -814,7 +814,7 @@
     </p:spTree>
     <p:extLst>
       <p:ext uri="{BB962C8B-B14F-4D97-AF65-F5344CB8AC3E}">
-        <p14:creationId xmlns:p14="http://schemas.microsoft.com/office/powerpoint/2010/main" val="46764303"/>
+        <p14:creationId xmlns:p14="http://schemas.microsoft.com/office/powerpoint/2010/main" val="3783181257"/>
       </p:ext>
     </p:extLst>
   </p:cSld>
@@ -853,8 +853,8 @@
         </p:nvSpPr>
         <p:spPr>
           <a:xfrm>
-            <a:off x="873443" y="5015236"/>
-            <a:ext cx="11041380" cy="8368029"/>
+            <a:off x="873443" y="4217358"/>
+            <a:ext cx="11041380" cy="7036751"/>
           </a:xfrm>
         </p:spPr>
         <p:txBody>
@@ -885,8 +885,8 @@
         </p:nvSpPr>
         <p:spPr>
           <a:xfrm>
-            <a:off x="873443" y="13462429"/>
-            <a:ext cx="11041380" cy="4400549"/>
+            <a:off x="873443" y="11320679"/>
+            <a:ext cx="11041380" cy="3700461"/>
           </a:xfrm>
         </p:spPr>
         <p:txBody>
@@ -1009,7 +1009,7 @@
           <a:p>
             <a:fld id="{A4BDA5CE-77F4-40B0-91A8-2181979C7B55}" type="datetimeFigureOut">
               <a:rPr lang="en-US" smtClean="0"/>
-              <a:t>01/04/26</a:t>
+              <a:t>01/13/26</a:t>
             </a:fld>
             <a:endParaRPr lang="en-US"/>
           </a:p>
@@ -1060,7 +1060,7 @@
     </p:spTree>
     <p:extLst>
       <p:ext uri="{BB962C8B-B14F-4D97-AF65-F5344CB8AC3E}">
-        <p14:creationId xmlns:p14="http://schemas.microsoft.com/office/powerpoint/2010/main" val="742031079"/>
+        <p14:creationId xmlns:p14="http://schemas.microsoft.com/office/powerpoint/2010/main" val="1793438649"/>
       </p:ext>
     </p:extLst>
   </p:cSld>
@@ -1122,8 +1122,8 @@
         </p:nvSpPr>
         <p:spPr>
           <a:xfrm>
-            <a:off x="880110" y="5355167"/>
-            <a:ext cx="5440680" cy="12763925"/>
+            <a:off x="880110" y="4503209"/>
+            <a:ext cx="5440680" cy="10733300"/>
           </a:xfrm>
         </p:spPr>
         <p:txBody>
@@ -1179,8 +1179,8 @@
         </p:nvSpPr>
         <p:spPr>
           <a:xfrm>
-            <a:off x="6480810" y="5355167"/>
-            <a:ext cx="5440680" cy="12763925"/>
+            <a:off x="6480810" y="4503209"/>
+            <a:ext cx="5440680" cy="10733300"/>
           </a:xfrm>
         </p:spPr>
         <p:txBody>
@@ -1241,7 +1241,7 @@
           <a:p>
             <a:fld id="{A4BDA5CE-77F4-40B0-91A8-2181979C7B55}" type="datetimeFigureOut">
               <a:rPr lang="en-US" smtClean="0"/>
-              <a:t>01/04/26</a:t>
+              <a:t>01/13/26</a:t>
             </a:fld>
             <a:endParaRPr lang="en-US"/>
           </a:p>
@@ -1292,7 +1292,7 @@
     </p:spTree>
     <p:extLst>
       <p:ext uri="{BB962C8B-B14F-4D97-AF65-F5344CB8AC3E}">
-        <p14:creationId xmlns:p14="http://schemas.microsoft.com/office/powerpoint/2010/main" val="1399479138"/>
+        <p14:creationId xmlns:p14="http://schemas.microsoft.com/office/powerpoint/2010/main" val="4273366303"/>
       </p:ext>
     </p:extLst>
   </p:cSld>
@@ -1331,8 +1331,8 @@
         </p:nvSpPr>
         <p:spPr>
           <a:xfrm>
-            <a:off x="881777" y="1071038"/>
-            <a:ext cx="11041380" cy="3888318"/>
+            <a:off x="881777" y="900645"/>
+            <a:ext cx="11041380" cy="3269722"/>
           </a:xfrm>
         </p:spPr>
         <p:txBody>
@@ -1359,8 +1359,8 @@
         </p:nvSpPr>
         <p:spPr>
           <a:xfrm>
-            <a:off x="881779" y="4931411"/>
-            <a:ext cx="5415676" cy="2416809"/>
+            <a:off x="881779" y="4146869"/>
+            <a:ext cx="5415676" cy="2032316"/>
           </a:xfrm>
         </p:spPr>
         <p:txBody>
@@ -1424,8 +1424,8 @@
         </p:nvSpPr>
         <p:spPr>
           <a:xfrm>
-            <a:off x="881779" y="7348220"/>
-            <a:ext cx="5415676" cy="10808125"/>
+            <a:off x="881779" y="6179185"/>
+            <a:ext cx="5415676" cy="9088650"/>
           </a:xfrm>
         </p:spPr>
         <p:txBody>
@@ -1481,8 +1481,8 @@
         </p:nvSpPr>
         <p:spPr>
           <a:xfrm>
-            <a:off x="6480811" y="4931411"/>
-            <a:ext cx="5442347" cy="2416809"/>
+            <a:off x="6480811" y="4146869"/>
+            <a:ext cx="5442347" cy="2032316"/>
           </a:xfrm>
         </p:spPr>
         <p:txBody>
@@ -1546,8 +1546,8 @@
         </p:nvSpPr>
         <p:spPr>
           <a:xfrm>
-            <a:off x="6480811" y="7348220"/>
-            <a:ext cx="5442347" cy="10808125"/>
+            <a:off x="6480811" y="6179185"/>
+            <a:ext cx="5442347" cy="9088650"/>
           </a:xfrm>
         </p:spPr>
         <p:txBody>
@@ -1608,7 +1608,7 @@
           <a:p>
             <a:fld id="{A4BDA5CE-77F4-40B0-91A8-2181979C7B55}" type="datetimeFigureOut">
               <a:rPr lang="en-US" smtClean="0"/>
-              <a:t>01/04/26</a:t>
+              <a:t>01/13/26</a:t>
             </a:fld>
             <a:endParaRPr lang="en-US"/>
           </a:p>
@@ -1659,7 +1659,7 @@
     </p:spTree>
     <p:extLst>
       <p:ext uri="{BB962C8B-B14F-4D97-AF65-F5344CB8AC3E}">
-        <p14:creationId xmlns:p14="http://schemas.microsoft.com/office/powerpoint/2010/main" val="3620336389"/>
+        <p14:creationId xmlns:p14="http://schemas.microsoft.com/office/powerpoint/2010/main" val="1753976893"/>
       </p:ext>
     </p:extLst>
   </p:cSld>
@@ -1726,7 +1726,7 @@
           <a:p>
             <a:fld id="{A4BDA5CE-77F4-40B0-91A8-2181979C7B55}" type="datetimeFigureOut">
               <a:rPr lang="en-US" smtClean="0"/>
-              <a:t>01/04/26</a:t>
+              <a:t>01/13/26</a:t>
             </a:fld>
             <a:endParaRPr lang="en-US"/>
           </a:p>
@@ -1777,7 +1777,7 @@
     </p:spTree>
     <p:extLst>
       <p:ext uri="{BB962C8B-B14F-4D97-AF65-F5344CB8AC3E}">
-        <p14:creationId xmlns:p14="http://schemas.microsoft.com/office/powerpoint/2010/main" val="2472017988"/>
+        <p14:creationId xmlns:p14="http://schemas.microsoft.com/office/powerpoint/2010/main" val="902864218"/>
       </p:ext>
     </p:extLst>
   </p:cSld>
@@ -1821,7 +1821,7 @@
           <a:p>
             <a:fld id="{A4BDA5CE-77F4-40B0-91A8-2181979C7B55}" type="datetimeFigureOut">
               <a:rPr lang="en-US" smtClean="0"/>
-              <a:t>01/04/26</a:t>
+              <a:t>01/13/26</a:t>
             </a:fld>
             <a:endParaRPr lang="en-US"/>
           </a:p>
@@ -1872,7 +1872,7 @@
     </p:spTree>
     <p:extLst>
       <p:ext uri="{BB962C8B-B14F-4D97-AF65-F5344CB8AC3E}">
-        <p14:creationId xmlns:p14="http://schemas.microsoft.com/office/powerpoint/2010/main" val="178172133"/>
+        <p14:creationId xmlns:p14="http://schemas.microsoft.com/office/powerpoint/2010/main" val="3283251485"/>
       </p:ext>
     </p:extLst>
   </p:cSld>
@@ -1911,8 +1911,8 @@
         </p:nvSpPr>
         <p:spPr>
           <a:xfrm>
-            <a:off x="881778" y="1341120"/>
-            <a:ext cx="4128849" cy="4693920"/>
+            <a:off x="881778" y="1127760"/>
+            <a:ext cx="4128849" cy="3947160"/>
           </a:xfrm>
         </p:spPr>
         <p:txBody>
@@ -1943,8 +1943,8 @@
         </p:nvSpPr>
         <p:spPr>
           <a:xfrm>
-            <a:off x="5442347" y="2896451"/>
-            <a:ext cx="6480810" cy="14295967"/>
+            <a:off x="5442347" y="2435652"/>
+            <a:ext cx="6480810" cy="12021608"/>
           </a:xfrm>
         </p:spPr>
         <p:txBody>
@@ -2028,8 +2028,8 @@
         </p:nvSpPr>
         <p:spPr>
           <a:xfrm>
-            <a:off x="881778" y="6035040"/>
-            <a:ext cx="4128849" cy="11180658"/>
+            <a:off x="881778" y="5074920"/>
+            <a:ext cx="4128849" cy="9401917"/>
           </a:xfrm>
         </p:spPr>
         <p:txBody>
@@ -2098,7 +2098,7 @@
           <a:p>
             <a:fld id="{A4BDA5CE-77F4-40B0-91A8-2181979C7B55}" type="datetimeFigureOut">
               <a:rPr lang="en-US" smtClean="0"/>
-              <a:t>01/04/26</a:t>
+              <a:t>01/13/26</a:t>
             </a:fld>
             <a:endParaRPr lang="en-US"/>
           </a:p>
@@ -2149,7 +2149,7 @@
     </p:spTree>
     <p:extLst>
       <p:ext uri="{BB962C8B-B14F-4D97-AF65-F5344CB8AC3E}">
-        <p14:creationId xmlns:p14="http://schemas.microsoft.com/office/powerpoint/2010/main" val="886570610"/>
+        <p14:creationId xmlns:p14="http://schemas.microsoft.com/office/powerpoint/2010/main" val="2386156881"/>
       </p:ext>
     </p:extLst>
   </p:cSld>
@@ -2188,8 +2188,8 @@
         </p:nvSpPr>
         <p:spPr>
           <a:xfrm>
-            <a:off x="881778" y="1341120"/>
-            <a:ext cx="4128849" cy="4693920"/>
+            <a:off x="881778" y="1127760"/>
+            <a:ext cx="4128849" cy="3947160"/>
           </a:xfrm>
         </p:spPr>
         <p:txBody>
@@ -2220,8 +2220,8 @@
         </p:nvSpPr>
         <p:spPr>
           <a:xfrm>
-            <a:off x="5442347" y="2896451"/>
-            <a:ext cx="6480810" cy="14295967"/>
+            <a:off x="5442347" y="2435652"/>
+            <a:ext cx="6480810" cy="12021608"/>
           </a:xfrm>
         </p:spPr>
         <p:txBody>
@@ -2285,8 +2285,8 @@
         </p:nvSpPr>
         <p:spPr>
           <a:xfrm>
-            <a:off x="881778" y="6035040"/>
-            <a:ext cx="4128849" cy="11180658"/>
+            <a:off x="881778" y="5074920"/>
+            <a:ext cx="4128849" cy="9401917"/>
           </a:xfrm>
         </p:spPr>
         <p:txBody>
@@ -2355,7 +2355,7 @@
           <a:p>
             <a:fld id="{A4BDA5CE-77F4-40B0-91A8-2181979C7B55}" type="datetimeFigureOut">
               <a:rPr lang="en-US" smtClean="0"/>
-              <a:t>01/04/26</a:t>
+              <a:t>01/13/26</a:t>
             </a:fld>
             <a:endParaRPr lang="en-US"/>
           </a:p>
@@ -2406,7 +2406,7 @@
     </p:spTree>
     <p:extLst>
       <p:ext uri="{BB962C8B-B14F-4D97-AF65-F5344CB8AC3E}">
-        <p14:creationId xmlns:p14="http://schemas.microsoft.com/office/powerpoint/2010/main" val="2986819166"/>
+        <p14:creationId xmlns:p14="http://schemas.microsoft.com/office/powerpoint/2010/main" val="2972422890"/>
       </p:ext>
     </p:extLst>
   </p:cSld>
@@ -2450,8 +2450,8 @@
         </p:nvSpPr>
         <p:spPr>
           <a:xfrm>
-            <a:off x="880110" y="1071038"/>
-            <a:ext cx="11041380" cy="3888318"/>
+            <a:off x="880110" y="900645"/>
+            <a:ext cx="11041380" cy="3269722"/>
           </a:xfrm>
           <a:prstGeom prst="rect">
             <a:avLst/>
@@ -2483,8 +2483,8 @@
         </p:nvSpPr>
         <p:spPr>
           <a:xfrm>
-            <a:off x="880110" y="5355167"/>
-            <a:ext cx="11041380" cy="12763925"/>
+            <a:off x="880110" y="4503209"/>
+            <a:ext cx="11041380" cy="10733300"/>
           </a:xfrm>
           <a:prstGeom prst="rect">
             <a:avLst/>
@@ -2545,8 +2545,8 @@
         </p:nvSpPr>
         <p:spPr>
           <a:xfrm>
-            <a:off x="880110" y="18645298"/>
-            <a:ext cx="2880360" cy="1071033"/>
+            <a:off x="880110" y="15679000"/>
+            <a:ext cx="2880360" cy="900642"/>
           </a:xfrm>
           <a:prstGeom prst="rect">
             <a:avLst/>
@@ -2568,7 +2568,7 @@
           <a:p>
             <a:fld id="{A4BDA5CE-77F4-40B0-91A8-2181979C7B55}" type="datetimeFigureOut">
               <a:rPr lang="en-US" smtClean="0"/>
-              <a:t>01/04/26</a:t>
+              <a:t>01/13/26</a:t>
             </a:fld>
             <a:endParaRPr lang="en-US"/>
           </a:p>
@@ -2586,8 +2586,8 @@
         </p:nvSpPr>
         <p:spPr>
           <a:xfrm>
-            <a:off x="4240530" y="18645298"/>
-            <a:ext cx="4320540" cy="1071033"/>
+            <a:off x="4240530" y="15679000"/>
+            <a:ext cx="4320540" cy="900642"/>
           </a:xfrm>
           <a:prstGeom prst="rect">
             <a:avLst/>
@@ -2623,8 +2623,8 @@
         </p:nvSpPr>
         <p:spPr>
           <a:xfrm>
-            <a:off x="9041130" y="18645298"/>
-            <a:ext cx="2880360" cy="1071033"/>
+            <a:off x="9041130" y="15679000"/>
+            <a:ext cx="2880360" cy="900642"/>
           </a:xfrm>
           <a:prstGeom prst="rect">
             <a:avLst/>
@@ -2655,23 +2655,23 @@
     </p:spTree>
     <p:extLst>
       <p:ext uri="{BB962C8B-B14F-4D97-AF65-F5344CB8AC3E}">
-        <p14:creationId xmlns:p14="http://schemas.microsoft.com/office/powerpoint/2010/main" val="1474349596"/>
+        <p14:creationId xmlns:p14="http://schemas.microsoft.com/office/powerpoint/2010/main" val="1187163374"/>
       </p:ext>
     </p:extLst>
   </p:cSld>
   <p:clrMap bg1="lt1" tx1="dk1" bg2="lt2" tx2="dk2" accent1="accent1" accent2="accent2" accent3="accent3" accent4="accent4" accent5="accent5" accent6="accent6" hlink="hlink" folHlink="folHlink"/>
   <p:sldLayoutIdLst>
-    <p:sldLayoutId id="2147483697" r:id="rId1"/>
-    <p:sldLayoutId id="2147483698" r:id="rId2"/>
-    <p:sldLayoutId id="2147483699" r:id="rId3"/>
-    <p:sldLayoutId id="2147483700" r:id="rId4"/>
-    <p:sldLayoutId id="2147483701" r:id="rId5"/>
-    <p:sldLayoutId id="2147483702" r:id="rId6"/>
-    <p:sldLayoutId id="2147483703" r:id="rId7"/>
-    <p:sldLayoutId id="2147483704" r:id="rId8"/>
-    <p:sldLayoutId id="2147483705" r:id="rId9"/>
-    <p:sldLayoutId id="2147483706" r:id="rId10"/>
-    <p:sldLayoutId id="2147483707" r:id="rId11"/>
+    <p:sldLayoutId id="2147483721" r:id="rId1"/>
+    <p:sldLayoutId id="2147483722" r:id="rId2"/>
+    <p:sldLayoutId id="2147483723" r:id="rId3"/>
+    <p:sldLayoutId id="2147483724" r:id="rId4"/>
+    <p:sldLayoutId id="2147483725" r:id="rId5"/>
+    <p:sldLayoutId id="2147483726" r:id="rId6"/>
+    <p:sldLayoutId id="2147483727" r:id="rId7"/>
+    <p:sldLayoutId id="2147483728" r:id="rId8"/>
+    <p:sldLayoutId id="2147483729" r:id="rId9"/>
+    <p:sldLayoutId id="2147483730" r:id="rId10"/>
+    <p:sldLayoutId id="2147483731" r:id="rId11"/>
   </p:sldLayoutIdLst>
   <p:txStyles>
     <p:titleStyle>
@@ -2975,10 +2975,10 @@
       </p:grpSpPr>
       <p:pic>
         <p:nvPicPr>
-          <p:cNvPr id="71" name="Graphic 70">
+          <p:cNvPr id="25" name="Graphic 24">
             <a:extLst>
               <a:ext uri="{FF2B5EF4-FFF2-40B4-BE49-F238E27FC236}">
-                <a16:creationId xmlns:a16="http://schemas.microsoft.com/office/drawing/2014/main" id="{DEB2A15F-96B8-B5FC-F3FD-D4947173D957}"/>
+                <a16:creationId xmlns:a16="http://schemas.microsoft.com/office/drawing/2014/main" id="{1FE7E77B-EEAD-9DFD-CB8F-8E3A1D5B6C04}"/>
               </a:ext>
             </a:extLst>
           </p:cNvPr>
@@ -3001,20 +3001,434 @@
         </p:blipFill>
         <p:spPr>
           <a:xfrm>
-            <a:off x="24660" y="12058133"/>
-            <a:ext cx="12776940" cy="8155493"/>
+            <a:off x="2221924" y="87592"/>
+            <a:ext cx="8648700" cy="4657725"/>
           </a:xfrm>
           <a:prstGeom prst="rect">
             <a:avLst/>
           </a:prstGeom>
         </p:spPr>
       </p:pic>
+      <p:cxnSp>
+        <p:nvCxnSpPr>
+          <p:cNvPr id="26" name="Straight Connector 25">
+            <a:extLst>
+              <a:ext uri="{FF2B5EF4-FFF2-40B4-BE49-F238E27FC236}">
+                <a16:creationId xmlns:a16="http://schemas.microsoft.com/office/drawing/2014/main" id="{099D6BC8-147D-9D7A-FDDA-5793C42DAE30}"/>
+              </a:ext>
+            </a:extLst>
+          </p:cNvPr>
+          <p:cNvCxnSpPr>
+            <a:cxnSpLocks/>
+          </p:cNvCxnSpPr>
+          <p:nvPr/>
+        </p:nvCxnSpPr>
+        <p:spPr>
+          <a:xfrm>
+            <a:off x="4226879" y="5801915"/>
+            <a:ext cx="1894114" cy="0"/>
+          </a:xfrm>
+          <a:prstGeom prst="line">
+            <a:avLst/>
+          </a:prstGeom>
+          <a:ln w="57150"/>
+        </p:spPr>
+        <p:style>
+          <a:lnRef idx="1">
+            <a:schemeClr val="dk1"/>
+          </a:lnRef>
+          <a:fillRef idx="0">
+            <a:schemeClr val="dk1"/>
+          </a:fillRef>
+          <a:effectRef idx="0">
+            <a:schemeClr val="dk1"/>
+          </a:effectRef>
+          <a:fontRef idx="minor">
+            <a:schemeClr val="tx1"/>
+          </a:fontRef>
+        </p:style>
+      </p:cxnSp>
+      <p:sp>
+        <p:nvSpPr>
+          <p:cNvPr id="27" name="TextBox 26">
+            <a:extLst>
+              <a:ext uri="{FF2B5EF4-FFF2-40B4-BE49-F238E27FC236}">
+                <a16:creationId xmlns:a16="http://schemas.microsoft.com/office/drawing/2014/main" id="{337C7DA1-D76E-CA21-B7F7-09185B4A0F58}"/>
+              </a:ext>
+            </a:extLst>
+          </p:cNvPr>
+          <p:cNvSpPr txBox="1"/>
+          <p:nvPr/>
+        </p:nvSpPr>
+        <p:spPr>
+          <a:xfrm>
+            <a:off x="3833376" y="5761859"/>
+            <a:ext cx="2681120" cy="1077218"/>
+          </a:xfrm>
+          <a:prstGeom prst="rect">
+            <a:avLst/>
+          </a:prstGeom>
+          <a:noFill/>
+        </p:spPr>
+        <p:txBody>
+          <a:bodyPr wrap="none" rtlCol="0">
+            <a:spAutoFit/>
+          </a:bodyPr>
+          <a:lstStyle/>
+          <a:p>
+            <a:pPr algn="ctr"/>
+            <a:r>
+              <a:rPr lang="en-US" sz="3200" u="sng" dirty="0">
+                <a:latin typeface="DejaVu Sans" panose="020B0603030804020204" pitchFamily="34" charset="0"/>
+                <a:ea typeface="DejaVu Sans" panose="020B0603030804020204" pitchFamily="34" charset="0"/>
+                <a:cs typeface="DejaVu Sans" panose="020B0603030804020204" pitchFamily="34" charset="0"/>
+              </a:rPr>
+              <a:t>Viral-human</a:t>
+            </a:r>
+          </a:p>
+          <a:p>
+            <a:pPr algn="ctr"/>
+            <a:r>
+              <a:rPr lang="en-US" sz="3200" u="sng" dirty="0">
+                <a:latin typeface="DejaVu Sans" panose="020B0603030804020204" pitchFamily="34" charset="0"/>
+                <a:ea typeface="DejaVu Sans" panose="020B0603030804020204" pitchFamily="34" charset="0"/>
+                <a:cs typeface="DejaVu Sans" panose="020B0603030804020204" pitchFamily="34" charset="0"/>
+              </a:rPr>
+              <a:t>interactions</a:t>
+            </a:r>
+          </a:p>
+        </p:txBody>
+      </p:sp>
+      <p:cxnSp>
+        <p:nvCxnSpPr>
+          <p:cNvPr id="28" name="Straight Connector 27">
+            <a:extLst>
+              <a:ext uri="{FF2B5EF4-FFF2-40B4-BE49-F238E27FC236}">
+                <a16:creationId xmlns:a16="http://schemas.microsoft.com/office/drawing/2014/main" id="{056BCF3B-E7D0-6C04-42B0-40BD44641A72}"/>
+              </a:ext>
+            </a:extLst>
+          </p:cNvPr>
+          <p:cNvCxnSpPr>
+            <a:cxnSpLocks/>
+          </p:cNvCxnSpPr>
+          <p:nvPr/>
+        </p:nvCxnSpPr>
+        <p:spPr>
+          <a:xfrm>
+            <a:off x="7166761" y="5801915"/>
+            <a:ext cx="1894114" cy="0"/>
+          </a:xfrm>
+          <a:prstGeom prst="line">
+            <a:avLst/>
+          </a:prstGeom>
+          <a:ln w="57150"/>
+        </p:spPr>
+        <p:style>
+          <a:lnRef idx="1">
+            <a:schemeClr val="dk1"/>
+          </a:lnRef>
+          <a:fillRef idx="0">
+            <a:schemeClr val="dk1"/>
+          </a:fillRef>
+          <a:effectRef idx="0">
+            <a:schemeClr val="dk1"/>
+          </a:effectRef>
+          <a:fontRef idx="minor">
+            <a:schemeClr val="tx1"/>
+          </a:fontRef>
+        </p:style>
+      </p:cxnSp>
+      <p:sp>
+        <p:nvSpPr>
+          <p:cNvPr id="29" name="TextBox 28">
+            <a:extLst>
+              <a:ext uri="{FF2B5EF4-FFF2-40B4-BE49-F238E27FC236}">
+                <a16:creationId xmlns:a16="http://schemas.microsoft.com/office/drawing/2014/main" id="{8164010F-4BA0-6D9C-08A5-213DAF0E45A9}"/>
+              </a:ext>
+            </a:extLst>
+          </p:cNvPr>
+          <p:cNvSpPr txBox="1"/>
+          <p:nvPr/>
+        </p:nvSpPr>
+        <p:spPr>
+          <a:xfrm>
+            <a:off x="6514496" y="5761859"/>
+            <a:ext cx="3469219" cy="1077218"/>
+          </a:xfrm>
+          <a:prstGeom prst="rect">
+            <a:avLst/>
+          </a:prstGeom>
+          <a:noFill/>
+        </p:spPr>
+        <p:txBody>
+          <a:bodyPr wrap="none" rtlCol="0">
+            <a:spAutoFit/>
+          </a:bodyPr>
+          <a:lstStyle/>
+          <a:p>
+            <a:pPr algn="ctr"/>
+            <a:r>
+              <a:rPr lang="en-US" sz="3200" u="sng" dirty="0">
+                <a:latin typeface="DejaVu Sans" panose="020B0603030804020204" pitchFamily="34" charset="0"/>
+                <a:ea typeface="DejaVu Sans" panose="020B0603030804020204" pitchFamily="34" charset="0"/>
+                <a:cs typeface="DejaVu Sans" panose="020B0603030804020204" pitchFamily="34" charset="0"/>
+              </a:rPr>
+              <a:t>Bacteria-human</a:t>
+            </a:r>
+          </a:p>
+          <a:p>
+            <a:pPr algn="ctr"/>
+            <a:r>
+              <a:rPr lang="en-US" sz="3200" u="sng" dirty="0">
+                <a:latin typeface="DejaVu Sans" panose="020B0603030804020204" pitchFamily="34" charset="0"/>
+                <a:ea typeface="DejaVu Sans" panose="020B0603030804020204" pitchFamily="34" charset="0"/>
+                <a:cs typeface="DejaVu Sans" panose="020B0603030804020204" pitchFamily="34" charset="0"/>
+              </a:rPr>
+              <a:t>interactions</a:t>
+            </a:r>
+          </a:p>
+        </p:txBody>
+      </p:sp>
+      <p:sp>
+        <p:nvSpPr>
+          <p:cNvPr id="30" name="TextBox 29">
+            <a:extLst>
+              <a:ext uri="{FF2B5EF4-FFF2-40B4-BE49-F238E27FC236}">
+                <a16:creationId xmlns:a16="http://schemas.microsoft.com/office/drawing/2014/main" id="{7E0E9D7B-6BC5-3276-B4EE-3D43B564AECE}"/>
+              </a:ext>
+            </a:extLst>
+          </p:cNvPr>
+          <p:cNvSpPr txBox="1"/>
+          <p:nvPr/>
+        </p:nvSpPr>
+        <p:spPr>
+          <a:xfrm rot="17907094">
+            <a:off x="5420601" y="4547247"/>
+            <a:ext cx="864339" cy="461665"/>
+          </a:xfrm>
+          <a:prstGeom prst="rect">
+            <a:avLst/>
+          </a:prstGeom>
+          <a:noFill/>
+        </p:spPr>
+        <p:txBody>
+          <a:bodyPr wrap="none" rtlCol="0">
+            <a:spAutoFit/>
+          </a:bodyPr>
+          <a:lstStyle/>
+          <a:p>
+            <a:r>
+              <a:rPr lang="en-US" sz="2400" dirty="0">
+                <a:latin typeface="DejaVu Sans" panose="020B0603030804020204" pitchFamily="34" charset="0"/>
+                <a:ea typeface="DejaVu Sans" panose="020B0603030804020204" pitchFamily="34" charset="0"/>
+                <a:cs typeface="DejaVu Sans" panose="020B0603030804020204" pitchFamily="34" charset="0"/>
+              </a:rPr>
+              <a:t>Joint</a:t>
+            </a:r>
+          </a:p>
+        </p:txBody>
+      </p:sp>
+      <p:sp>
+        <p:nvSpPr>
+          <p:cNvPr id="31" name="TextBox 30">
+            <a:extLst>
+              <a:ext uri="{FF2B5EF4-FFF2-40B4-BE49-F238E27FC236}">
+                <a16:creationId xmlns:a16="http://schemas.microsoft.com/office/drawing/2014/main" id="{C2D7CBA1-FFE6-CAB3-EF2E-BDBC71399802}"/>
+              </a:ext>
+            </a:extLst>
+          </p:cNvPr>
+          <p:cNvSpPr txBox="1"/>
+          <p:nvPr/>
+        </p:nvSpPr>
+        <p:spPr>
+          <a:xfrm rot="17907094">
+            <a:off x="4616038" y="4587274"/>
+            <a:ext cx="955390" cy="461665"/>
+          </a:xfrm>
+          <a:prstGeom prst="rect">
+            <a:avLst/>
+          </a:prstGeom>
+          <a:noFill/>
+        </p:spPr>
+        <p:txBody>
+          <a:bodyPr wrap="none" rtlCol="0">
+            <a:spAutoFit/>
+          </a:bodyPr>
+          <a:lstStyle/>
+          <a:p>
+            <a:r>
+              <a:rPr lang="en-US" sz="2400" dirty="0">
+                <a:latin typeface="DejaVu Sans" panose="020B0603030804020204" pitchFamily="34" charset="0"/>
+                <a:ea typeface="DejaVu Sans" panose="020B0603030804020204" pitchFamily="34" charset="0"/>
+                <a:cs typeface="DejaVu Sans" panose="020B0603030804020204" pitchFamily="34" charset="0"/>
+              </a:rPr>
+              <a:t>Virus</a:t>
+            </a:r>
+          </a:p>
+        </p:txBody>
+      </p:sp>
+      <p:sp>
+        <p:nvSpPr>
+          <p:cNvPr id="32" name="TextBox 31">
+            <a:extLst>
+              <a:ext uri="{FF2B5EF4-FFF2-40B4-BE49-F238E27FC236}">
+                <a16:creationId xmlns:a16="http://schemas.microsoft.com/office/drawing/2014/main" id="{F25A93E0-2F07-889F-1009-E84FDCBFA71A}"/>
+              </a:ext>
+            </a:extLst>
+          </p:cNvPr>
+          <p:cNvSpPr txBox="1"/>
+          <p:nvPr/>
+        </p:nvSpPr>
+        <p:spPr>
+          <a:xfrm rot="17907094">
+            <a:off x="3745624" y="4697128"/>
+            <a:ext cx="1295547" cy="461665"/>
+          </a:xfrm>
+          <a:prstGeom prst="rect">
+            <a:avLst/>
+          </a:prstGeom>
+          <a:noFill/>
+        </p:spPr>
+        <p:txBody>
+          <a:bodyPr wrap="none" rtlCol="0">
+            <a:spAutoFit/>
+          </a:bodyPr>
+          <a:lstStyle/>
+          <a:p>
+            <a:r>
+              <a:rPr lang="en-US" sz="2400" dirty="0">
+                <a:latin typeface="DejaVu Sans" panose="020B0603030804020204" pitchFamily="34" charset="0"/>
+                <a:ea typeface="DejaVu Sans" panose="020B0603030804020204" pitchFamily="34" charset="0"/>
+                <a:cs typeface="DejaVu Sans" panose="020B0603030804020204" pitchFamily="34" charset="0"/>
+              </a:rPr>
+              <a:t>Human</a:t>
+            </a:r>
+          </a:p>
+        </p:txBody>
+      </p:sp>
+      <p:sp>
+        <p:nvSpPr>
+          <p:cNvPr id="33" name="TextBox 32">
+            <a:extLst>
+              <a:ext uri="{FF2B5EF4-FFF2-40B4-BE49-F238E27FC236}">
+                <a16:creationId xmlns:a16="http://schemas.microsoft.com/office/drawing/2014/main" id="{20D41099-2FB8-88DA-C0E2-2563E3A2D1FB}"/>
+              </a:ext>
+            </a:extLst>
+          </p:cNvPr>
+          <p:cNvSpPr txBox="1"/>
+          <p:nvPr/>
+        </p:nvSpPr>
+        <p:spPr>
+          <a:xfrm rot="17907094">
+            <a:off x="8225782" y="4547247"/>
+            <a:ext cx="864339" cy="461665"/>
+          </a:xfrm>
+          <a:prstGeom prst="rect">
+            <a:avLst/>
+          </a:prstGeom>
+          <a:noFill/>
+        </p:spPr>
+        <p:txBody>
+          <a:bodyPr wrap="none" rtlCol="0">
+            <a:spAutoFit/>
+          </a:bodyPr>
+          <a:lstStyle/>
+          <a:p>
+            <a:r>
+              <a:rPr lang="en-US" sz="2400" dirty="0">
+                <a:latin typeface="DejaVu Sans" panose="020B0603030804020204" pitchFamily="34" charset="0"/>
+                <a:ea typeface="DejaVu Sans" panose="020B0603030804020204" pitchFamily="34" charset="0"/>
+                <a:cs typeface="DejaVu Sans" panose="020B0603030804020204" pitchFamily="34" charset="0"/>
+              </a:rPr>
+              <a:t>Joint</a:t>
+            </a:r>
+          </a:p>
+        </p:txBody>
+      </p:sp>
+      <p:sp>
+        <p:nvSpPr>
+          <p:cNvPr id="34" name="TextBox 33">
+            <a:extLst>
+              <a:ext uri="{FF2B5EF4-FFF2-40B4-BE49-F238E27FC236}">
+                <a16:creationId xmlns:a16="http://schemas.microsoft.com/office/drawing/2014/main" id="{2139CBFB-C4BA-73E7-A150-D93173CFC8E5}"/>
+              </a:ext>
+            </a:extLst>
+          </p:cNvPr>
+          <p:cNvSpPr txBox="1"/>
+          <p:nvPr/>
+        </p:nvSpPr>
+        <p:spPr>
+          <a:xfrm rot="17907094">
+            <a:off x="7130289" y="4756793"/>
+            <a:ext cx="1465466" cy="461665"/>
+          </a:xfrm>
+          <a:prstGeom prst="rect">
+            <a:avLst/>
+          </a:prstGeom>
+          <a:noFill/>
+        </p:spPr>
+        <p:txBody>
+          <a:bodyPr wrap="none" rtlCol="0">
+            <a:spAutoFit/>
+          </a:bodyPr>
+          <a:lstStyle/>
+          <a:p>
+            <a:r>
+              <a:rPr lang="en-US" sz="2400" dirty="0">
+                <a:latin typeface="DejaVu Sans" panose="020B0603030804020204" pitchFamily="34" charset="0"/>
+                <a:ea typeface="DejaVu Sans" panose="020B0603030804020204" pitchFamily="34" charset="0"/>
+                <a:cs typeface="DejaVu Sans" panose="020B0603030804020204" pitchFamily="34" charset="0"/>
+              </a:rPr>
+              <a:t>Bacteria</a:t>
+            </a:r>
+          </a:p>
+        </p:txBody>
+      </p:sp>
+      <p:sp>
+        <p:nvSpPr>
+          <p:cNvPr id="35" name="TextBox 34">
+            <a:extLst>
+              <a:ext uri="{FF2B5EF4-FFF2-40B4-BE49-F238E27FC236}">
+                <a16:creationId xmlns:a16="http://schemas.microsoft.com/office/drawing/2014/main" id="{8D477DE3-E64B-F640-32F6-7E2BC189D271}"/>
+              </a:ext>
+            </a:extLst>
+          </p:cNvPr>
+          <p:cNvSpPr txBox="1"/>
+          <p:nvPr/>
+        </p:nvSpPr>
+        <p:spPr>
+          <a:xfrm rot="17907094">
+            <a:off x="6550805" y="4697128"/>
+            <a:ext cx="1295547" cy="461665"/>
+          </a:xfrm>
+          <a:prstGeom prst="rect">
+            <a:avLst/>
+          </a:prstGeom>
+          <a:noFill/>
+        </p:spPr>
+        <p:txBody>
+          <a:bodyPr wrap="none" rtlCol="0">
+            <a:spAutoFit/>
+          </a:bodyPr>
+          <a:lstStyle/>
+          <a:p>
+            <a:r>
+              <a:rPr lang="en-US" sz="2400" dirty="0">
+                <a:latin typeface="DejaVu Sans" panose="020B0603030804020204" pitchFamily="34" charset="0"/>
+                <a:ea typeface="DejaVu Sans" panose="020B0603030804020204" pitchFamily="34" charset="0"/>
+                <a:cs typeface="DejaVu Sans" panose="020B0603030804020204" pitchFamily="34" charset="0"/>
+              </a:rPr>
+              <a:t>Human</a:t>
+            </a:r>
+          </a:p>
+        </p:txBody>
+      </p:sp>
       <p:pic>
         <p:nvPicPr>
-          <p:cNvPr id="3" name="Graphic 2">
+          <p:cNvPr id="36" name="Graphic 35">
             <a:extLst>
               <a:ext uri="{FF2B5EF4-FFF2-40B4-BE49-F238E27FC236}">
-                <a16:creationId xmlns:a16="http://schemas.microsoft.com/office/drawing/2014/main" id="{3A9AC91E-EFE2-F13E-0753-278D23DFB885}"/>
+                <a16:creationId xmlns:a16="http://schemas.microsoft.com/office/drawing/2014/main" id="{FB7ACD5F-604F-8FCC-8C4D-08F7EB4B5C86}"/>
               </a:ext>
             </a:extLst>
           </p:cNvPr>
@@ -3037,8 +3451,8 @@
         </p:blipFill>
         <p:spPr>
           <a:xfrm>
-            <a:off x="118872" y="7491887"/>
-            <a:ext cx="6281928" cy="4731452"/>
+            <a:off x="7053311" y="7480973"/>
+            <a:ext cx="5490990" cy="4394841"/>
           </a:xfrm>
           <a:prstGeom prst="rect">
             <a:avLst/>
@@ -3047,10 +3461,10 @@
       </p:pic>
       <p:pic>
         <p:nvPicPr>
-          <p:cNvPr id="58" name="Graphic 57">
+          <p:cNvPr id="37" name="Graphic 36">
             <a:extLst>
               <a:ext uri="{FF2B5EF4-FFF2-40B4-BE49-F238E27FC236}">
-                <a16:creationId xmlns:a16="http://schemas.microsoft.com/office/drawing/2014/main" id="{1F67563E-914B-8AFA-EF9C-C5235C7D729B}"/>
+                <a16:creationId xmlns:a16="http://schemas.microsoft.com/office/drawing/2014/main" id="{AA9D139E-8230-41A9-2A44-C1DB3CA595C4}"/>
               </a:ext>
             </a:extLst>
           </p:cNvPr>
@@ -3073,434 +3487,20 @@
         </p:blipFill>
         <p:spPr>
           <a:xfrm>
-            <a:off x="2076450" y="518066"/>
-            <a:ext cx="8648700" cy="4657725"/>
+            <a:off x="263625" y="7355682"/>
+            <a:ext cx="6282649" cy="4855707"/>
           </a:xfrm>
           <a:prstGeom prst="rect">
             <a:avLst/>
           </a:prstGeom>
         </p:spPr>
       </p:pic>
-      <p:cxnSp>
-        <p:nvCxnSpPr>
-          <p:cNvPr id="59" name="Straight Connector 58">
+      <p:pic>
+        <p:nvPicPr>
+          <p:cNvPr id="38" name="Graphic 37">
             <a:extLst>
               <a:ext uri="{FF2B5EF4-FFF2-40B4-BE49-F238E27FC236}">
-                <a16:creationId xmlns:a16="http://schemas.microsoft.com/office/drawing/2014/main" id="{E6070A99-A954-0F94-6D11-922841AC2728}"/>
-              </a:ext>
-            </a:extLst>
-          </p:cNvPr>
-          <p:cNvCxnSpPr>
-            <a:cxnSpLocks/>
-          </p:cNvCxnSpPr>
-          <p:nvPr/>
-        </p:nvCxnSpPr>
-        <p:spPr>
-          <a:xfrm>
-            <a:off x="4081405" y="6232389"/>
-            <a:ext cx="1894114" cy="0"/>
-          </a:xfrm>
-          <a:prstGeom prst="line">
-            <a:avLst/>
-          </a:prstGeom>
-          <a:ln w="57150"/>
-        </p:spPr>
-        <p:style>
-          <a:lnRef idx="1">
-            <a:schemeClr val="dk1"/>
-          </a:lnRef>
-          <a:fillRef idx="0">
-            <a:schemeClr val="dk1"/>
-          </a:fillRef>
-          <a:effectRef idx="0">
-            <a:schemeClr val="dk1"/>
-          </a:effectRef>
-          <a:fontRef idx="minor">
-            <a:schemeClr val="tx1"/>
-          </a:fontRef>
-        </p:style>
-      </p:cxnSp>
-      <p:sp>
-        <p:nvSpPr>
-          <p:cNvPr id="60" name="TextBox 59">
-            <a:extLst>
-              <a:ext uri="{FF2B5EF4-FFF2-40B4-BE49-F238E27FC236}">
-                <a16:creationId xmlns:a16="http://schemas.microsoft.com/office/drawing/2014/main" id="{28753C7C-EFDB-19E1-EF5B-F9C7A08FF0EB}"/>
-              </a:ext>
-            </a:extLst>
-          </p:cNvPr>
-          <p:cNvSpPr txBox="1"/>
-          <p:nvPr/>
-        </p:nvSpPr>
-        <p:spPr>
-          <a:xfrm>
-            <a:off x="3687902" y="6192333"/>
-            <a:ext cx="2681120" cy="1077218"/>
-          </a:xfrm>
-          <a:prstGeom prst="rect">
-            <a:avLst/>
-          </a:prstGeom>
-          <a:noFill/>
-        </p:spPr>
-        <p:txBody>
-          <a:bodyPr wrap="none" rtlCol="0">
-            <a:spAutoFit/>
-          </a:bodyPr>
-          <a:lstStyle/>
-          <a:p>
-            <a:pPr algn="ctr"/>
-            <a:r>
-              <a:rPr lang="en-US" sz="3200" u="sng" dirty="0">
-                <a:latin typeface="DejaVu Sans" panose="020B0603030804020204" pitchFamily="34" charset="0"/>
-                <a:ea typeface="DejaVu Sans" panose="020B0603030804020204" pitchFamily="34" charset="0"/>
-                <a:cs typeface="DejaVu Sans" panose="020B0603030804020204" pitchFamily="34" charset="0"/>
-              </a:rPr>
-              <a:t>Viral-human</a:t>
-            </a:r>
-          </a:p>
-          <a:p>
-            <a:pPr algn="ctr"/>
-            <a:r>
-              <a:rPr lang="en-US" sz="3200" u="sng" dirty="0">
-                <a:latin typeface="DejaVu Sans" panose="020B0603030804020204" pitchFamily="34" charset="0"/>
-                <a:ea typeface="DejaVu Sans" panose="020B0603030804020204" pitchFamily="34" charset="0"/>
-                <a:cs typeface="DejaVu Sans" panose="020B0603030804020204" pitchFamily="34" charset="0"/>
-              </a:rPr>
-              <a:t>interactions</a:t>
-            </a:r>
-          </a:p>
-        </p:txBody>
-      </p:sp>
-      <p:cxnSp>
-        <p:nvCxnSpPr>
-          <p:cNvPr id="61" name="Straight Connector 60">
-            <a:extLst>
-              <a:ext uri="{FF2B5EF4-FFF2-40B4-BE49-F238E27FC236}">
-                <a16:creationId xmlns:a16="http://schemas.microsoft.com/office/drawing/2014/main" id="{39305C24-3A04-7F31-36EC-72E2C7F95808}"/>
-              </a:ext>
-            </a:extLst>
-          </p:cNvPr>
-          <p:cNvCxnSpPr>
-            <a:cxnSpLocks/>
-          </p:cNvCxnSpPr>
-          <p:nvPr/>
-        </p:nvCxnSpPr>
-        <p:spPr>
-          <a:xfrm>
-            <a:off x="7021287" y="6232389"/>
-            <a:ext cx="1894114" cy="0"/>
-          </a:xfrm>
-          <a:prstGeom prst="line">
-            <a:avLst/>
-          </a:prstGeom>
-          <a:ln w="57150"/>
-        </p:spPr>
-        <p:style>
-          <a:lnRef idx="1">
-            <a:schemeClr val="dk1"/>
-          </a:lnRef>
-          <a:fillRef idx="0">
-            <a:schemeClr val="dk1"/>
-          </a:fillRef>
-          <a:effectRef idx="0">
-            <a:schemeClr val="dk1"/>
-          </a:effectRef>
-          <a:fontRef idx="minor">
-            <a:schemeClr val="tx1"/>
-          </a:fontRef>
-        </p:style>
-      </p:cxnSp>
-      <p:sp>
-        <p:nvSpPr>
-          <p:cNvPr id="62" name="TextBox 61">
-            <a:extLst>
-              <a:ext uri="{FF2B5EF4-FFF2-40B4-BE49-F238E27FC236}">
-                <a16:creationId xmlns:a16="http://schemas.microsoft.com/office/drawing/2014/main" id="{D1B684F0-AD2A-6F93-4513-258CFA9C16C0}"/>
-              </a:ext>
-            </a:extLst>
-          </p:cNvPr>
-          <p:cNvSpPr txBox="1"/>
-          <p:nvPr/>
-        </p:nvSpPr>
-        <p:spPr>
-          <a:xfrm>
-            <a:off x="6369022" y="6192333"/>
-            <a:ext cx="3469219" cy="1077218"/>
-          </a:xfrm>
-          <a:prstGeom prst="rect">
-            <a:avLst/>
-          </a:prstGeom>
-          <a:noFill/>
-        </p:spPr>
-        <p:txBody>
-          <a:bodyPr wrap="none" rtlCol="0">
-            <a:spAutoFit/>
-          </a:bodyPr>
-          <a:lstStyle/>
-          <a:p>
-            <a:pPr algn="ctr"/>
-            <a:r>
-              <a:rPr lang="en-US" sz="3200" u="sng" dirty="0">
-                <a:latin typeface="DejaVu Sans" panose="020B0603030804020204" pitchFamily="34" charset="0"/>
-                <a:ea typeface="DejaVu Sans" panose="020B0603030804020204" pitchFamily="34" charset="0"/>
-                <a:cs typeface="DejaVu Sans" panose="020B0603030804020204" pitchFamily="34" charset="0"/>
-              </a:rPr>
-              <a:t>Bacteria-human</a:t>
-            </a:r>
-          </a:p>
-          <a:p>
-            <a:pPr algn="ctr"/>
-            <a:r>
-              <a:rPr lang="en-US" sz="3200" u="sng" dirty="0">
-                <a:latin typeface="DejaVu Sans" panose="020B0603030804020204" pitchFamily="34" charset="0"/>
-                <a:ea typeface="DejaVu Sans" panose="020B0603030804020204" pitchFamily="34" charset="0"/>
-                <a:cs typeface="DejaVu Sans" panose="020B0603030804020204" pitchFamily="34" charset="0"/>
-              </a:rPr>
-              <a:t>interactions</a:t>
-            </a:r>
-          </a:p>
-        </p:txBody>
-      </p:sp>
-      <p:sp>
-        <p:nvSpPr>
-          <p:cNvPr id="63" name="TextBox 62">
-            <a:extLst>
-              <a:ext uri="{FF2B5EF4-FFF2-40B4-BE49-F238E27FC236}">
-                <a16:creationId xmlns:a16="http://schemas.microsoft.com/office/drawing/2014/main" id="{4B8BEF60-9A82-E484-295A-343FC9BEFF6E}"/>
-              </a:ext>
-            </a:extLst>
-          </p:cNvPr>
-          <p:cNvSpPr txBox="1"/>
-          <p:nvPr/>
-        </p:nvSpPr>
-        <p:spPr>
-          <a:xfrm rot="17907094">
-            <a:off x="5149171" y="5073974"/>
-            <a:ext cx="1135504" cy="461665"/>
-          </a:xfrm>
-          <a:prstGeom prst="rect">
-            <a:avLst/>
-          </a:prstGeom>
-          <a:noFill/>
-        </p:spPr>
-        <p:txBody>
-          <a:bodyPr wrap="none" rtlCol="0">
-            <a:spAutoFit/>
-          </a:bodyPr>
-          <a:lstStyle/>
-          <a:p>
-            <a:r>
-              <a:rPr lang="en-US" sz="2400" dirty="0">
-                <a:latin typeface="DejaVu Sans" panose="020B0603030804020204" pitchFamily="34" charset="0"/>
-                <a:ea typeface="DejaVu Sans" panose="020B0603030804020204" pitchFamily="34" charset="0"/>
-                <a:cs typeface="DejaVu Sans" panose="020B0603030804020204" pitchFamily="34" charset="0"/>
-              </a:rPr>
-              <a:t>Paired</a:t>
-            </a:r>
-          </a:p>
-        </p:txBody>
-      </p:sp>
-      <p:sp>
-        <p:nvSpPr>
-          <p:cNvPr id="64" name="TextBox 63">
-            <a:extLst>
-              <a:ext uri="{FF2B5EF4-FFF2-40B4-BE49-F238E27FC236}">
-                <a16:creationId xmlns:a16="http://schemas.microsoft.com/office/drawing/2014/main" id="{46C8CBDE-450F-86E7-4273-786F90C171CF}"/>
-              </a:ext>
-            </a:extLst>
-          </p:cNvPr>
-          <p:cNvSpPr txBox="1"/>
-          <p:nvPr/>
-        </p:nvSpPr>
-        <p:spPr>
-          <a:xfrm rot="17907094">
-            <a:off x="4470564" y="5017748"/>
-            <a:ext cx="955390" cy="461665"/>
-          </a:xfrm>
-          <a:prstGeom prst="rect">
-            <a:avLst/>
-          </a:prstGeom>
-          <a:noFill/>
-        </p:spPr>
-        <p:txBody>
-          <a:bodyPr wrap="none" rtlCol="0">
-            <a:spAutoFit/>
-          </a:bodyPr>
-          <a:lstStyle/>
-          <a:p>
-            <a:r>
-              <a:rPr lang="en-US" sz="2400" dirty="0">
-                <a:latin typeface="DejaVu Sans" panose="020B0603030804020204" pitchFamily="34" charset="0"/>
-                <a:ea typeface="DejaVu Sans" panose="020B0603030804020204" pitchFamily="34" charset="0"/>
-                <a:cs typeface="DejaVu Sans" panose="020B0603030804020204" pitchFamily="34" charset="0"/>
-              </a:rPr>
-              <a:t>Virus</a:t>
-            </a:r>
-          </a:p>
-        </p:txBody>
-      </p:sp>
-      <p:sp>
-        <p:nvSpPr>
-          <p:cNvPr id="65" name="TextBox 64">
-            <a:extLst>
-              <a:ext uri="{FF2B5EF4-FFF2-40B4-BE49-F238E27FC236}">
-                <a16:creationId xmlns:a16="http://schemas.microsoft.com/office/drawing/2014/main" id="{417BEBEF-835B-4319-9455-5BA6E76CD9BE}"/>
-              </a:ext>
-            </a:extLst>
-          </p:cNvPr>
-          <p:cNvSpPr txBox="1"/>
-          <p:nvPr/>
-        </p:nvSpPr>
-        <p:spPr>
-          <a:xfrm rot="17907094">
-            <a:off x="3600150" y="5127602"/>
-            <a:ext cx="1295547" cy="461665"/>
-          </a:xfrm>
-          <a:prstGeom prst="rect">
-            <a:avLst/>
-          </a:prstGeom>
-          <a:noFill/>
-        </p:spPr>
-        <p:txBody>
-          <a:bodyPr wrap="none" rtlCol="0">
-            <a:spAutoFit/>
-          </a:bodyPr>
-          <a:lstStyle/>
-          <a:p>
-            <a:r>
-              <a:rPr lang="en-US" sz="2400" dirty="0">
-                <a:latin typeface="DejaVu Sans" panose="020B0603030804020204" pitchFamily="34" charset="0"/>
-                <a:ea typeface="DejaVu Sans" panose="020B0603030804020204" pitchFamily="34" charset="0"/>
-                <a:cs typeface="DejaVu Sans" panose="020B0603030804020204" pitchFamily="34" charset="0"/>
-              </a:rPr>
-              <a:t>Human</a:t>
-            </a:r>
-          </a:p>
-        </p:txBody>
-      </p:sp>
-      <p:sp>
-        <p:nvSpPr>
-          <p:cNvPr id="66" name="TextBox 65">
-            <a:extLst>
-              <a:ext uri="{FF2B5EF4-FFF2-40B4-BE49-F238E27FC236}">
-                <a16:creationId xmlns:a16="http://schemas.microsoft.com/office/drawing/2014/main" id="{9C10DF5F-C5B5-558E-FE84-2496F2A99B49}"/>
-              </a:ext>
-            </a:extLst>
-          </p:cNvPr>
-          <p:cNvSpPr txBox="1"/>
-          <p:nvPr/>
-        </p:nvSpPr>
-        <p:spPr>
-          <a:xfrm rot="17907094">
-            <a:off x="7954352" y="5073974"/>
-            <a:ext cx="1135504" cy="461665"/>
-          </a:xfrm>
-          <a:prstGeom prst="rect">
-            <a:avLst/>
-          </a:prstGeom>
-          <a:noFill/>
-        </p:spPr>
-        <p:txBody>
-          <a:bodyPr wrap="none" rtlCol="0">
-            <a:spAutoFit/>
-          </a:bodyPr>
-          <a:lstStyle/>
-          <a:p>
-            <a:r>
-              <a:rPr lang="en-US" sz="2400" dirty="0">
-                <a:latin typeface="DejaVu Sans" panose="020B0603030804020204" pitchFamily="34" charset="0"/>
-                <a:ea typeface="DejaVu Sans" panose="020B0603030804020204" pitchFamily="34" charset="0"/>
-                <a:cs typeface="DejaVu Sans" panose="020B0603030804020204" pitchFamily="34" charset="0"/>
-              </a:rPr>
-              <a:t>Paired</a:t>
-            </a:r>
-          </a:p>
-        </p:txBody>
-      </p:sp>
-      <p:sp>
-        <p:nvSpPr>
-          <p:cNvPr id="67" name="TextBox 66">
-            <a:extLst>
-              <a:ext uri="{FF2B5EF4-FFF2-40B4-BE49-F238E27FC236}">
-                <a16:creationId xmlns:a16="http://schemas.microsoft.com/office/drawing/2014/main" id="{F2148990-2A87-DDEF-8FBE-B0FF3FC5C563}"/>
-              </a:ext>
-            </a:extLst>
-          </p:cNvPr>
-          <p:cNvSpPr txBox="1"/>
-          <p:nvPr/>
-        </p:nvSpPr>
-        <p:spPr>
-          <a:xfrm rot="17907094">
-            <a:off x="6984815" y="5187267"/>
-            <a:ext cx="1465466" cy="461665"/>
-          </a:xfrm>
-          <a:prstGeom prst="rect">
-            <a:avLst/>
-          </a:prstGeom>
-          <a:noFill/>
-        </p:spPr>
-        <p:txBody>
-          <a:bodyPr wrap="none" rtlCol="0">
-            <a:spAutoFit/>
-          </a:bodyPr>
-          <a:lstStyle/>
-          <a:p>
-            <a:r>
-              <a:rPr lang="en-US" sz="2400" dirty="0">
-                <a:latin typeface="DejaVu Sans" panose="020B0603030804020204" pitchFamily="34" charset="0"/>
-                <a:ea typeface="DejaVu Sans" panose="020B0603030804020204" pitchFamily="34" charset="0"/>
-                <a:cs typeface="DejaVu Sans" panose="020B0603030804020204" pitchFamily="34" charset="0"/>
-              </a:rPr>
-              <a:t>Bacteria</a:t>
-            </a:r>
-          </a:p>
-        </p:txBody>
-      </p:sp>
-      <p:sp>
-        <p:nvSpPr>
-          <p:cNvPr id="68" name="TextBox 67">
-            <a:extLst>
-              <a:ext uri="{FF2B5EF4-FFF2-40B4-BE49-F238E27FC236}">
-                <a16:creationId xmlns:a16="http://schemas.microsoft.com/office/drawing/2014/main" id="{C73AF95F-4C8E-9106-27A2-5D799E0156F3}"/>
-              </a:ext>
-            </a:extLst>
-          </p:cNvPr>
-          <p:cNvSpPr txBox="1"/>
-          <p:nvPr/>
-        </p:nvSpPr>
-        <p:spPr>
-          <a:xfrm rot="17907094">
-            <a:off x="6405331" y="5127602"/>
-            <a:ext cx="1295547" cy="461665"/>
-          </a:xfrm>
-          <a:prstGeom prst="rect">
-            <a:avLst/>
-          </a:prstGeom>
-          <a:noFill/>
-        </p:spPr>
-        <p:txBody>
-          <a:bodyPr wrap="none" rtlCol="0">
-            <a:spAutoFit/>
-          </a:bodyPr>
-          <a:lstStyle/>
-          <a:p>
-            <a:r>
-              <a:rPr lang="en-US" sz="2400" dirty="0">
-                <a:latin typeface="DejaVu Sans" panose="020B0603030804020204" pitchFamily="34" charset="0"/>
-                <a:ea typeface="DejaVu Sans" panose="020B0603030804020204" pitchFamily="34" charset="0"/>
-                <a:cs typeface="DejaVu Sans" panose="020B0603030804020204" pitchFamily="34" charset="0"/>
-              </a:rPr>
-              <a:t>Human</a:t>
-            </a:r>
-          </a:p>
-        </p:txBody>
-      </p:sp>
-      <p:pic>
-        <p:nvPicPr>
-          <p:cNvPr id="69" name="Graphic 68">
-            <a:extLst>
-              <a:ext uri="{FF2B5EF4-FFF2-40B4-BE49-F238E27FC236}">
-                <a16:creationId xmlns:a16="http://schemas.microsoft.com/office/drawing/2014/main" id="{7FB91569-B4DB-F3AA-C167-C47A6EF46401}"/>
+                <a16:creationId xmlns:a16="http://schemas.microsoft.com/office/drawing/2014/main" id="{4641D37C-4E58-F7C4-E727-C3E3CB88E43B}"/>
               </a:ext>
             </a:extLst>
           </p:cNvPr>
@@ -3523,8 +3523,8 @@
         </p:blipFill>
         <p:spPr>
           <a:xfrm>
-            <a:off x="6907837" y="7491887"/>
-            <a:ext cx="5490990" cy="4394841"/>
+            <a:off x="170134" y="12359332"/>
+            <a:ext cx="7140850" cy="4557989"/>
           </a:xfrm>
           <a:prstGeom prst="rect">
             <a:avLst/>
@@ -3533,10 +3533,10 @@
       </p:pic>
       <p:sp>
         <p:nvSpPr>
-          <p:cNvPr id="72" name="TextBox 71">
+          <p:cNvPr id="39" name="TextBox 38">
             <a:extLst>
               <a:ext uri="{FF2B5EF4-FFF2-40B4-BE49-F238E27FC236}">
-                <a16:creationId xmlns:a16="http://schemas.microsoft.com/office/drawing/2014/main" id="{9C64D918-1F43-AAE6-82FD-F2A54EF7DF94}"/>
+                <a16:creationId xmlns:a16="http://schemas.microsoft.com/office/drawing/2014/main" id="{4B0ED309-4806-1391-989D-6863D107D24C}"/>
               </a:ext>
             </a:extLst>
           </p:cNvPr>
@@ -3545,7 +3545,7 @@
         </p:nvSpPr>
         <p:spPr>
           <a:xfrm>
-            <a:off x="118151" y="7425872"/>
+            <a:off x="263625" y="6874627"/>
             <a:ext cx="471604" cy="646331"/>
           </a:xfrm>
           <a:prstGeom prst="rect">
@@ -3568,10 +3568,10 @@
       </p:sp>
       <p:sp>
         <p:nvSpPr>
-          <p:cNvPr id="73" name="TextBox 72">
+          <p:cNvPr id="40" name="TextBox 39">
             <a:extLst>
               <a:ext uri="{FF2B5EF4-FFF2-40B4-BE49-F238E27FC236}">
-                <a16:creationId xmlns:a16="http://schemas.microsoft.com/office/drawing/2014/main" id="{D5CC8950-8F41-5E67-CC62-7D4CBD3985E3}"/>
+                <a16:creationId xmlns:a16="http://schemas.microsoft.com/office/drawing/2014/main" id="{6F714B37-C33E-8C60-36AF-D2970B1ED8D6}"/>
               </a:ext>
             </a:extLst>
           </p:cNvPr>
@@ -3580,7 +3580,7 @@
         </p:nvSpPr>
         <p:spPr>
           <a:xfrm>
-            <a:off x="6258489" y="7431121"/>
+            <a:off x="6403963" y="6879876"/>
             <a:ext cx="510076" cy="646331"/>
           </a:xfrm>
           <a:prstGeom prst="rect">
@@ -3603,10 +3603,10 @@
       </p:sp>
       <p:sp>
         <p:nvSpPr>
-          <p:cNvPr id="74" name="TextBox 73">
+          <p:cNvPr id="41" name="TextBox 40">
             <a:extLst>
               <a:ext uri="{FF2B5EF4-FFF2-40B4-BE49-F238E27FC236}">
-                <a16:creationId xmlns:a16="http://schemas.microsoft.com/office/drawing/2014/main" id="{F5CCE724-FDC0-3EE0-98A7-F8D9546CDD7C}"/>
+                <a16:creationId xmlns:a16="http://schemas.microsoft.com/office/drawing/2014/main" id="{6E2C5FA6-A0A4-FC47-F440-6D4980EAF250}"/>
               </a:ext>
             </a:extLst>
           </p:cNvPr>
@@ -3615,7 +3615,7 @@
         </p:nvSpPr>
         <p:spPr>
           <a:xfrm>
-            <a:off x="1433718" y="-13002"/>
+            <a:off x="934956" y="34506"/>
             <a:ext cx="471604" cy="646331"/>
           </a:xfrm>
           <a:prstGeom prst="rect">
@@ -3638,10 +3638,10 @@
       </p:sp>
       <p:sp>
         <p:nvSpPr>
-          <p:cNvPr id="75" name="TextBox 74">
+          <p:cNvPr id="42" name="TextBox 41">
             <a:extLst>
               <a:ext uri="{FF2B5EF4-FFF2-40B4-BE49-F238E27FC236}">
-                <a16:creationId xmlns:a16="http://schemas.microsoft.com/office/drawing/2014/main" id="{223ED74A-9F2A-A91E-E807-39935231F5A0}"/>
+                <a16:creationId xmlns:a16="http://schemas.microsoft.com/office/drawing/2014/main" id="{5FBEB118-1938-62D2-7B70-6D7AC1CC468F}"/>
               </a:ext>
             </a:extLst>
           </p:cNvPr>
@@ -3650,7 +3650,7 @@
         </p:nvSpPr>
         <p:spPr>
           <a:xfrm>
-            <a:off x="55095" y="11693403"/>
+            <a:off x="208482" y="12013955"/>
             <a:ext cx="511679" cy="646331"/>
           </a:xfrm>
           <a:prstGeom prst="rect">
@@ -3667,6 +3667,77 @@
             <a:r>
               <a:rPr lang="en-US" sz="3600" b="1" dirty="0"/>
               <a:t>D</a:t>
+            </a:r>
+          </a:p>
+        </p:txBody>
+      </p:sp>
+      <p:pic>
+        <p:nvPicPr>
+          <p:cNvPr id="43" name="Graphic 42">
+            <a:extLst>
+              <a:ext uri="{FF2B5EF4-FFF2-40B4-BE49-F238E27FC236}">
+                <a16:creationId xmlns:a16="http://schemas.microsoft.com/office/drawing/2014/main" id="{93DE96AF-209C-DCE4-E46F-B0CFD3C9AB98}"/>
+              </a:ext>
+            </a:extLst>
+          </p:cNvPr>
+          <p:cNvPicPr>
+            <a:picLocks noChangeAspect="1"/>
+          </p:cNvPicPr>
+          <p:nvPr/>
+        </p:nvPicPr>
+        <p:blipFill>
+          <a:blip r:embed="rId10">
+            <a:extLst>
+              <a:ext uri="{96DAC541-7B7A-43D3-8B79-37D633B846F1}">
+                <asvg:svgBlip xmlns:asvg="http://schemas.microsoft.com/office/drawing/2016/SVG/main" r:embed="rId11"/>
+              </a:ext>
+            </a:extLst>
+          </a:blip>
+          <a:stretch>
+            <a:fillRect/>
+          </a:stretch>
+        </p:blipFill>
+        <p:spPr>
+          <a:xfrm>
+            <a:off x="7223413" y="12411089"/>
+            <a:ext cx="5391150" cy="4476750"/>
+          </a:xfrm>
+          <a:prstGeom prst="rect">
+            <a:avLst/>
+          </a:prstGeom>
+        </p:spPr>
+      </p:pic>
+      <p:sp>
+        <p:nvSpPr>
+          <p:cNvPr id="44" name="TextBox 43">
+            <a:extLst>
+              <a:ext uri="{FF2B5EF4-FFF2-40B4-BE49-F238E27FC236}">
+                <a16:creationId xmlns:a16="http://schemas.microsoft.com/office/drawing/2014/main" id="{AEE8E7A2-641F-6043-3AE0-3FC3262B8CBF}"/>
+              </a:ext>
+            </a:extLst>
+          </p:cNvPr>
+          <p:cNvSpPr txBox="1"/>
+          <p:nvPr/>
+        </p:nvSpPr>
+        <p:spPr>
+          <a:xfrm>
+            <a:off x="7300084" y="12013955"/>
+            <a:ext cx="449162" cy="646331"/>
+          </a:xfrm>
+          <a:prstGeom prst="rect">
+            <a:avLst/>
+          </a:prstGeom>
+          <a:noFill/>
+        </p:spPr>
+        <p:txBody>
+          <a:bodyPr wrap="none" rtlCol="0">
+            <a:spAutoFit/>
+          </a:bodyPr>
+          <a:lstStyle/>
+          <a:p>
+            <a:r>
+              <a:rPr lang="en-US" sz="3600" b="1" dirty="0"/>
+              <a:t>E</a:t>
             </a:r>
           </a:p>
         </p:txBody>
